--- a/lecons/F2T/12_S06_L3_P2_Desert_Climate.pptx
+++ b/lecons/F2T/12_S06_L3_P2_Desert_Climate.pptx
@@ -59,10 +59,9 @@
     <p:sldId id="307" r:id="rId53"/>
     <p:sldId id="308" r:id="rId54"/>
     <p:sldId id="309" r:id="rId55"/>
-    <p:sldId id="310" r:id="rId56"/>
   </p:sldIdLst>
   <p:notesMasterIdLst>
-    <p:notesMasterId r:id="rId57"/>
+    <p:notesMasterId r:id="rId56"/>
   </p:notesMasterIdLst>
   <p:sldSz cx="12192000" cy="6858000"/>
   <p:notesSz cx="6858000" cy="12192000"/>
@@ -644,7 +643,7 @@
           <a:p>
             <a:r>
               <a:rPr lang="en-US" dirty="0"/>
-              <a:t>Listen carefully to this situation from real life. Oumarou, a lorry driver from Garoua, crosses the Sahara. In the day, the metal of his lorry is too hot to touch. But at night, he is so cold that he needs a blanket. Think about it, because I am going to ask you some questions.</a:t>
+              <a:t>Listen carefully to this situation from real life. Oumarou, a lorry driver from Garoua, crosses the Sahara. In the day, the metal of his lorry is too hot to touch, but at night he needs a blanket. Oumarou asks: "Why is the desert so hot by day and so cold at night?" Think about it, because I am going to ask you some questions.</a:t>
             </a:r>
             <a:endParaRPr lang="en-US" dirty="0"/>
           </a:p>
@@ -820,7 +819,7 @@
           <a:p>
             <a:r>
               <a:rPr lang="en-US" dirty="0"/>
-              <a:t>Good. Oumarou does not understand why the desert is hot by day and cold at night.</a:t>
+              <a:t>Good. Oumarou does not understand the great difference between day and night in the desert.</a:t>
             </a:r>
             <a:endParaRPr lang="en-US" dirty="0"/>
           </a:p>
@@ -908,7 +907,7 @@
           <a:p>
             <a:r>
               <a:rPr lang="en-US" dirty="0"/>
-              <a:t>Question 2: How is the desert in the day and at night? Think for a moment, then raise your hand to answer.</a:t>
+              <a:t>Question 2: How is the day? Think for a moment, then raise your hand to answer.</a:t>
             </a:r>
             <a:endParaRPr lang="en-US" dirty="0"/>
           </a:p>
@@ -996,7 +995,7 @@
           <a:p>
             <a:r>
               <a:rPr lang="en-US" dirty="0"/>
-              <a:t>Good. Very hot in the day and cold at night.</a:t>
+              <a:t>Good. Very hot.</a:t>
             </a:r>
             <a:endParaRPr lang="en-US" dirty="0"/>
           </a:p>
@@ -1084,7 +1083,7 @@
           <a:p>
             <a:r>
               <a:rPr lang="en-US" dirty="0"/>
-              <a:t>Question 3: What should he take with him? Think for a moment, then raise your hand to answer.</a:t>
+              <a:t>Question 3: How is the night? Think for a moment, then raise your hand to answer.</a:t>
             </a:r>
             <a:endParaRPr lang="en-US" dirty="0"/>
           </a:p>
@@ -1172,7 +1171,7 @@
           <a:p>
             <a:r>
               <a:rPr lang="en-US" dirty="0"/>
-              <a:t>Good. Water, light clothes for the day and a blanket for the night.</a:t>
+              <a:t>Good. Cold.</a:t>
             </a:r>
             <a:endParaRPr lang="en-US" dirty="0"/>
           </a:p>
@@ -1436,7 +1435,7 @@
           <a:p>
             <a:r>
               <a:rPr lang="en-US" dirty="0"/>
-              <a:t>Activity 1. Look carefully at this diagram: rain per year in Douala, Garoua and Aswan (Egypt). Observe every detail before I ask the question.</a:t>
+              <a:t>Activity 1. Look carefully at this diagram: rainfall of Aswan and Garoua. Observe every detail before I ask the question.</a:t>
             </a:r>
             <a:endParaRPr lang="en-US" dirty="0"/>
           </a:p>
@@ -1612,7 +1611,7 @@
           <a:p>
             <a:r>
               <a:rPr lang="en-US" dirty="0"/>
-              <a:t>Here is the question for Activity 1: Compare the rain of Aswan with the rain of Garoua. Take one minute to think and write your answer in your rough notebook.</a:t>
+              <a:t>Here is the question for Activity 1: Which town gets almost no rain: Aswan or Garoua? Take one minute to think and write your answer in your rough notebook.</a:t>
             </a:r>
             <a:endParaRPr lang="en-US" dirty="0"/>
           </a:p>
@@ -1700,7 +1699,7 @@
           <a:p>
             <a:r>
               <a:rPr lang="en-US" dirty="0"/>
-              <a:t>Let us check the answer together. Aswan gets only 2 mm. Garoua gets 1,000 mm, 500 times more.</a:t>
+              <a:t>Let us check the answer together. Aswan (about 2 mm per year).</a:t>
             </a:r>
             <a:endParaRPr lang="en-US" dirty="0"/>
           </a:p>
@@ -1788,7 +1787,7 @@
           <a:p>
             <a:r>
               <a:rPr lang="en-US" dirty="0"/>
-              <a:t>Activity 2. Look carefully at this picture: a sudden flood in a dry desert valley. Observe every detail before I ask the question.</a:t>
+              <a:t>Activity 2. Look carefully at this picture: a sudden flood in a dry valley. Observe every detail before I ask the question.</a:t>
             </a:r>
             <a:endParaRPr lang="en-US" dirty="0"/>
           </a:p>
@@ -1876,7 +1875,7 @@
           <a:p>
             <a:r>
               <a:rPr lang="en-US" dirty="0"/>
-              <a:t>Here is the question for Activity 2: In the desert, rain can stop for years, then a storm brings a flood. What does this show? Take one minute to think and write your answer in your rough notebook.</a:t>
+              <a:t>Here is the question for Activity 2: What does this sudden flood show about desert rain? Take one minute to think and write your answer in your rough notebook.</a:t>
             </a:r>
             <a:endParaRPr lang="en-US" dirty="0"/>
           </a:p>
@@ -1964,7 +1963,7 @@
           <a:p>
             <a:r>
               <a:rPr lang="en-US" dirty="0"/>
-              <a:t>Let us check the answer together. The rain is rare and irregular.</a:t>
+              <a:t>Let us check the answer together. The rain is rare and irregular, but can be very heavy.</a:t>
             </a:r>
             <a:endParaRPr lang="en-US" dirty="0"/>
           </a:p>
@@ -2052,7 +2051,7 @@
           <a:p>
             <a:r>
               <a:rPr lang="en-US" dirty="0"/>
-              <a:t>Activity 3. Look carefully at this diagram: aswan (Egypt): temperature in the day (red) and at night (blue). Observe every detail before I ask the question.</a:t>
+              <a:t>Activity 3. Look carefully at this diagram: day and night temperatures of Aswan. Observe every detail before I ask the question.</a:t>
             </a:r>
             <a:endParaRPr lang="en-US" dirty="0"/>
           </a:p>
@@ -2140,7 +2139,7 @@
           <a:p>
             <a:r>
               <a:rPr lang="en-US" dirty="0"/>
-              <a:t>Here is the question for Activity 3: What is the temperature in July in the day and at night? What is the difference? Take one minute to think and write your answer in your rough notebook.</a:t>
+              <a:t>Here is the question for Activity 3: What is the difference between day and night in July? Take one minute to think and write your answer in your rough notebook.</a:t>
             </a:r>
             <a:endParaRPr lang="en-US" dirty="0"/>
           </a:p>
@@ -2228,7 +2227,7 @@
           <a:p>
             <a:r>
               <a:rPr lang="en-US" dirty="0"/>
-              <a:t>Let us check the answer together. Day 42 °C, night 26 °C. The difference is 16 °C.</a:t>
+              <a:t>Let us check the answer together. 42 − 26 = 16 °C.</a:t>
             </a:r>
             <a:endParaRPr lang="en-US" dirty="0"/>
           </a:p>
@@ -2316,7 +2315,7 @@
           <a:p>
             <a:r>
               <a:rPr lang="en-US" dirty="0"/>
-              <a:t>Activity 4. Look carefully at this animation: animation: the desert by day and at night. Watch the animation to the end; it will play again.</a:t>
+              <a:t>Activity 4. Look carefully at this animation: animation: the desert at night. Watch the animation to the end; it will play again.</a:t>
             </a:r>
             <a:endParaRPr lang="en-US" dirty="0"/>
           </a:p>
@@ -2580,7 +2579,7 @@
           <a:p>
             <a:r>
               <a:rPr lang="en-US" dirty="0"/>
-              <a:t>Let us check the answer together. There are no clouds, so the heat escapes into the sky.</a:t>
+              <a:t>Let us check the answer together. There are no clouds, so the heat escapes.</a:t>
             </a:r>
             <a:endParaRPr lang="en-US" dirty="0"/>
           </a:p>
@@ -2668,7 +2667,7 @@
           <a:p>
             <a:r>
               <a:rPr lang="en-US" dirty="0"/>
-              <a:t>Activity 5. Look carefully at this picture: a sandstorm arrives. Observe every detail before I ask the question.</a:t>
+              <a:t>Activity 5. Look carefully at this picture: a sandstorm. Observe every detail before I ask the question.</a:t>
             </a:r>
             <a:endParaRPr lang="en-US" dirty="0"/>
           </a:p>
@@ -2756,7 +2755,7 @@
           <a:p>
             <a:r>
               <a:rPr lang="en-US" dirty="0"/>
-              <a:t>Here is the question for Activity 5: What is this? Give one danger. Take one minute to think and write your answer in your rough notebook.</a:t>
+              <a:t>Here is the question for Activity 5: What is this? Take one minute to think and write your answer in your rough notebook.</a:t>
             </a:r>
             <a:endParaRPr lang="en-US" dirty="0"/>
           </a:p>
@@ -2844,7 +2843,7 @@
           <a:p>
             <a:r>
               <a:rPr lang="en-US" dirty="0"/>
-              <a:t>Let us check the answer together. A sandstorm. People cannot see, and it hurts the eyes and lungs.</a:t>
+              <a:t>Let us check the answer together. A sandstorm.</a:t>
             </a:r>
             <a:endParaRPr lang="en-US" dirty="0"/>
           </a:p>
@@ -3020,7 +3019,7 @@
           <a:p>
             <a:r>
               <a:rPr lang="en-US" dirty="0"/>
-              <a:t>Let us copy the definitions. The key terms of this lesson are defined as follows. On this slide we have Daily temperature range and Sandstorm. Write each point on a new line, with the key term first, and explain it in your own words when we revise.</a:t>
+              <a:t>Let us copy the definitions. The key terms of this lesson are defined as follows. On this slide we have Daily range of temperature. Write each point on a new line, with the key term first, and explain it in your own words when we revise.</a:t>
             </a:r>
             <a:endParaRPr lang="en-US" dirty="0"/>
           </a:p>
@@ -3108,7 +3107,7 @@
           <a:p>
             <a:r>
               <a:rPr lang="en-US" dirty="0"/>
-              <a:t>Let us copy Rainfall. Rainfall in hot deserts has the following characteristics. On this slide we have Very little rain and Irregular rain. Write each point on a new line, with the key term first, and explain it in your own words when we revise. When you finish, we go to the next slide.</a:t>
+              <a:t>Let us copy Rainfall. Desert rainfall has the following characteristics. Copy the point on Very little rain on the left, then draw the diagram on the right: rainfall of Aswan and Garoua. Give it a title and label it clearly.</a:t>
             </a:r>
             <a:endParaRPr lang="en-US" dirty="0"/>
           </a:p>
@@ -3196,7 +3195,7 @@
           <a:p>
             <a:r>
               <a:rPr lang="en-US" dirty="0"/>
-              <a:t>We continue with Rainfall. On this slide we have Clear skies. Write each point on a new line, with the key term first, and explain it in your own words when we revise.</a:t>
+              <a:t>We continue with Rainfall. On this slide we have Irregular rain and Sudden storms. Write each point on a new line, with the key term first, and explain it in your own words when we revise.</a:t>
             </a:r>
             <a:endParaRPr lang="en-US" dirty="0"/>
           </a:p>
@@ -3284,7 +3283,7 @@
           <a:p>
             <a:r>
               <a:rPr lang="en-US" dirty="0"/>
-              <a:t>Let us copy Temperatures. Temperatures in hot deserts, as at Aswan in Egypt, have the following characteristics. On this slide we have Hot days and Cold nights. Write each point on a new line, with the key term first, and explain it in your own words when we revise. When you finish, we go to the next slide.</a:t>
+              <a:t>Let us copy Temperature. Desert temperatures have the following characteristics. Copy the point on Very hot days on the left, then draw the diagram on the right: temperatures of Aswan. Give it a title and label it clearly.</a:t>
             </a:r>
             <a:endParaRPr lang="en-US" dirty="0"/>
           </a:p>
@@ -3372,7 +3371,7 @@
           <a:p>
             <a:r>
               <a:rPr lang="en-US" dirty="0"/>
-              <a:t>We continue with Temperatures. On this slide we have Large daily range. Write each point on a new line, with the key term first, and explain it in your own words when we revise.</a:t>
+              <a:t>We continue with Temperature. On this slide we have Cold nights and Large daily range. Write each point on a new line, with the key term first, and explain it in your own words when we revise.</a:t>
             </a:r>
             <a:endParaRPr lang="en-US" dirty="0"/>
           </a:p>
@@ -3548,7 +3547,7 @@
           <a:p>
             <a:r>
               <a:rPr lang="en-US" dirty="0"/>
-              <a:t>Now draw this illustration in your notebook: temperatures at Aswan. Give it a title and label it clearly.</a:t>
+              <a:t>Let us copy Winds and Humidity. The air of the desert has the following characteristics. On this slide we have Dry air and Hot, dry winds. Write each point on a new line, with the key term first, and explain it in your own words when we revise.</a:t>
             </a:r>
             <a:endParaRPr lang="en-US" dirty="0"/>
           </a:p>
@@ -3636,7 +3635,7 @@
           <a:p>
             <a:r>
               <a:rPr lang="en-US" dirty="0"/>
-              <a:t>Let us copy Winds. Winds in hot deserts have the following characteristics. On this slide we have Hot, dry winds and Sandstorms. Write each point on a new line, with the key term first, and explain it in your own words when we revise.</a:t>
+              <a:t>Copy the point on Sandstorms on the left, then draw the diagram on the right: a sandstorm. Give it a title and label it clearly.</a:t>
             </a:r>
             <a:endParaRPr lang="en-US" dirty="0"/>
           </a:p>
@@ -4780,7 +4779,7 @@
           <a:p>
             <a:r>
               <a:rPr lang="en-US" dirty="0"/>
-              <a:t>Take your time to copy this part; we will continue together.</a:t>
+              <a:t>This slide is for me, the teacher: it gives the timing of the lesson and what to do if the projector is not available.</a:t>
             </a:r>
             <a:endParaRPr lang="en-US" dirty="0"/>
           </a:p>
@@ -4868,7 +4867,7 @@
           <a:p>
             <a:r>
               <a:rPr lang="en-US" dirty="0"/>
-              <a:t>This slide is for me, the teacher: it gives the timing of the lesson and what to do if the projector is not available.</a:t>
+              <a:t>These are the references and picture credits used to prepare this lesson.</a:t>
             </a:r>
             <a:endParaRPr lang="en-US" dirty="0"/>
           </a:p>
@@ -4892,94 +4891,6 @@
             <a:fld id="{F7021451-1387-4CA6-816F-3879F97B5CBC}" type="slidenum">
               <a:rPr lang="en-US"/>
               <a:t>54</a:t>
-            </a:fld>
-            <a:endParaRPr lang="en-US"/>
-          </a:p>
-        </p:txBody>
-      </p:sp>
-    </p:spTree>
-    <p:extLst>
-      <p:ext uri="{BB962C8B-B14F-4D97-AF65-F5344CB8AC3E}">
-        <p14:creationId xmlns:p14="http://schemas.microsoft.com/office/powerpoint/2010/main" val="1024086991"/>
-      </p:ext>
-    </p:extLst>
-  </p:cSld>
-  <p:clrMapOvr>
-    <a:masterClrMapping/>
-  </p:clrMapOvr>
-</p:notes>
-</file>
-
-<file path=ppt/notesSlides/notesSlide55.xml><?xml version="1.0" encoding="utf-8"?>
-<p:notes xmlns:a="http://schemas.openxmlformats.org/drawingml/2006/main" xmlns:r="http://schemas.openxmlformats.org/officeDocument/2006/relationships" xmlns:p="http://schemas.openxmlformats.org/presentationml/2006/main">
-  <p:cSld>
-    <p:spTree>
-      <p:nvGrpSpPr>
-        <p:cNvPr id="1" name=""/>
-        <p:cNvGrpSpPr/>
-        <p:nvPr/>
-      </p:nvGrpSpPr>
-      <p:grpSpPr>
-        <a:xfrm>
-          <a:off x="0" y="0"/>
-          <a:ext cx="0" cy="0"/>
-          <a:chOff x="0" y="0"/>
-          <a:chExt cx="0" cy="0"/>
-        </a:xfrm>
-      </p:grpSpPr>
-      <p:sp>
-        <p:nvSpPr>
-          <p:cNvPr id="2" name="Slide Image Placeholder 1"/>
-          <p:cNvSpPr>
-            <a:spLocks noGrp="1" noRot="1" noChangeAspect="1"/>
-          </p:cNvSpPr>
-          <p:nvPr>
-            <p:ph type="sldImg"/>
-          </p:nvPr>
-        </p:nvSpPr>
-        <p:spPr/>
-      </p:sp>
-      <p:sp>
-        <p:nvSpPr>
-          <p:cNvPr id="3" name="Notes Placeholder 2"/>
-          <p:cNvSpPr>
-            <a:spLocks noGrp="1"/>
-          </p:cNvSpPr>
-          <p:nvPr>
-            <p:ph type="body" idx="1"/>
-          </p:nvPr>
-        </p:nvSpPr>
-        <p:spPr/>
-        <p:txBody>
-          <a:bodyPr/>
-          <a:lstStyle/>
-          <a:p>
-            <a:r>
-              <a:rPr lang="en-US" dirty="0"/>
-              <a:t>These are the references and picture credits used to prepare this lesson.</a:t>
-            </a:r>
-            <a:endParaRPr lang="en-US" dirty="0"/>
-          </a:p>
-        </p:txBody>
-      </p:sp>
-      <p:sp>
-        <p:nvSpPr>
-          <p:cNvPr id="4" name="Slide Number Placeholder 3"/>
-          <p:cNvSpPr>
-            <a:spLocks noGrp="1"/>
-          </p:cNvSpPr>
-          <p:nvPr>
-            <p:ph type="sldNum" sz="quarter" idx="10"/>
-          </p:nvPr>
-        </p:nvSpPr>
-        <p:spPr/>
-        <p:txBody>
-          <a:bodyPr/>
-          <a:lstStyle/>
-          <a:p>
-            <a:fld id="{F7021451-1387-4CA6-816F-3879F97B5CBC}" type="slidenum">
-              <a:rPr lang="en-US"/>
-              <a:t>55</a:t>
             </a:fld>
             <a:endParaRPr lang="en-US"/>
           </a:p>
@@ -6688,7 +6599,7 @@
         <p:spPr>
           <a:xfrm>
             <a:off x="0" y="658368"/>
-            <a:ext cx="5120640" cy="5833872"/>
+            <a:ext cx="3840480" cy="5833872"/>
           </a:xfrm>
           <a:prstGeom prst="rect">
             <a:avLst/>
@@ -6703,8 +6614,8 @@
         </p:nvSpPr>
         <p:spPr>
           <a:xfrm>
-            <a:off x="5349240" y="1005840"/>
-            <a:ext cx="6522415" cy="731520"/>
+            <a:off x="4069080" y="1005840"/>
+            <a:ext cx="7802575" cy="731520"/>
           </a:xfrm>
           <a:prstGeom prst="rect">
             <a:avLst/>
@@ -6744,8 +6655,8 @@
         </p:nvSpPr>
         <p:spPr>
           <a:xfrm>
-            <a:off x="5349240" y="1783080"/>
-            <a:ext cx="6522415" cy="4663440"/>
+            <a:off x="4069080" y="1783080"/>
+            <a:ext cx="7802575" cy="4663440"/>
           </a:xfrm>
           <a:prstGeom prst="rect">
             <a:avLst/>
@@ -6772,7 +6683,7 @@
                 <a:ea typeface="Times New Roman" pitchFamily="34" charset="-122"/>
                 <a:cs typeface="Times New Roman" pitchFamily="34" charset="-120"/>
               </a:rPr>
-              <a:t>Oumarou, a lorry driver from Garoua, crosses the Sahara. In the day, the metal of his lorry is too hot to touch. But at night, he is so cold that he needs a blanket.</a:t>
+              <a:t>Oumarou, a lorry driver from Garoua, crosses the Sahara. In the day, the metal of his lorry is too hot to touch, but at night he needs a blanket. Oumarou asks: "Why is the desert so hot by day and so cold at night?"</a:t>
             </a:r>
             <a:endParaRPr lang="en-US" sz="4000" dirty="0"/>
           </a:p>
@@ -7210,7 +7121,7 @@
                 <a:ea typeface="Times New Roman" pitchFamily="34" charset="-122"/>
                 <a:cs typeface="Times New Roman" pitchFamily="34" charset="-120"/>
               </a:rPr>
-              <a:t>Oumarou does not understand why the desert is hot by day and cold at night.</a:t>
+              <a:t>Oumarou does not understand the great difference between day and night in the desert.</a:t>
             </a:r>
             <a:endParaRPr lang="en-US" sz="4000" dirty="0"/>
           </a:p>
@@ -7429,7 +7340,7 @@
                 <a:ea typeface="Times New Roman" pitchFamily="34" charset="-122"/>
                 <a:cs typeface="Times New Roman" pitchFamily="34" charset="-120"/>
               </a:rPr>
-              <a:t>How is the desert in the day and at night?</a:t>
+              <a:t>How is the day?</a:t>
             </a:r>
             <a:endParaRPr lang="en-US" sz="4000" dirty="0"/>
           </a:p>
@@ -7648,7 +7559,7 @@
                 <a:ea typeface="Times New Roman" pitchFamily="34" charset="-122"/>
                 <a:cs typeface="Times New Roman" pitchFamily="34" charset="-120"/>
               </a:rPr>
-              <a:t>Very hot in the day and cold at night.</a:t>
+              <a:t>Very hot.</a:t>
             </a:r>
             <a:endParaRPr lang="en-US" sz="4000" dirty="0"/>
           </a:p>
@@ -7867,7 +7778,7 @@
                 <a:ea typeface="Times New Roman" pitchFamily="34" charset="-122"/>
                 <a:cs typeface="Times New Roman" pitchFamily="34" charset="-120"/>
               </a:rPr>
-              <a:t>What should he take with him?</a:t>
+              <a:t>How is the night?</a:t>
             </a:r>
             <a:endParaRPr lang="en-US" sz="4000" dirty="0"/>
           </a:p>
@@ -8086,7 +7997,7 @@
                 <a:ea typeface="Times New Roman" pitchFamily="34" charset="-122"/>
                 <a:cs typeface="Times New Roman" pitchFamily="34" charset="-120"/>
               </a:rPr>
-              <a:t>Water, light clothes for the day and a blanket for the night.</a:t>
+              <a:t>Cold.</a:t>
             </a:r>
             <a:endParaRPr lang="en-US" sz="4000" dirty="0"/>
           </a:p>
@@ -8738,7 +8649,7 @@
                 <a:ea typeface="Times New Roman" pitchFamily="34" charset="-122"/>
                 <a:cs typeface="Times New Roman" pitchFamily="34" charset="-120"/>
               </a:rPr>
-              <a:t>Rain per year in Douala, Garoua and Aswan (Egypt).</a:t>
+              <a:t>Rainfall of Aswan and Garoua.</a:t>
             </a:r>
             <a:endParaRPr lang="en-US" sz="1800" dirty="0"/>
           </a:p>
@@ -9552,7 +9463,7 @@
                 <a:ea typeface="Times New Roman" pitchFamily="34" charset="-122"/>
                 <a:cs typeface="Times New Roman" pitchFamily="34" charset="-120"/>
               </a:rPr>
-              <a:t>Compare the rain of Aswan with the rain of Garoua.</a:t>
+              <a:t>Which town gets almost no rain: Aswan or Garoua?</a:t>
             </a:r>
             <a:endParaRPr lang="en-US" sz="4000" dirty="0"/>
           </a:p>
@@ -9771,7 +9682,7 @@
                 <a:ea typeface="Times New Roman" pitchFamily="34" charset="-122"/>
                 <a:cs typeface="Times New Roman" pitchFamily="34" charset="-120"/>
               </a:rPr>
-              <a:t>Aswan gets only 2 mm. Garoua gets 1,000 mm, 500 times more.</a:t>
+              <a:t>Aswan (about 2 mm per year).</a:t>
             </a:r>
             <a:endParaRPr lang="en-US" sz="4000" dirty="0"/>
           </a:p>
@@ -9985,7 +9896,7 @@
                 <a:ea typeface="Times New Roman" pitchFamily="34" charset="-122"/>
                 <a:cs typeface="Times New Roman" pitchFamily="34" charset="-120"/>
               </a:rPr>
-              <a:t>A sudden flood in a dry desert valley.</a:t>
+              <a:t>A sudden flood in a dry valley.</a:t>
             </a:r>
             <a:endParaRPr lang="en-US" sz="1800" dirty="0"/>
           </a:p>
@@ -10204,7 +10115,7 @@
                 <a:ea typeface="Times New Roman" pitchFamily="34" charset="-122"/>
                 <a:cs typeface="Times New Roman" pitchFamily="34" charset="-120"/>
               </a:rPr>
-              <a:t>In the desert, rain can stop for years, then a storm brings a flood. What does this show?</a:t>
+              <a:t>What does this sudden flood show about desert rain?</a:t>
             </a:r>
             <a:endParaRPr lang="en-US" sz="4000" dirty="0"/>
           </a:p>
@@ -10423,7 +10334,7 @@
                 <a:ea typeface="Times New Roman" pitchFamily="34" charset="-122"/>
                 <a:cs typeface="Times New Roman" pitchFamily="34" charset="-120"/>
               </a:rPr>
-              <a:t>The rain is rare and irregular.</a:t>
+              <a:t>The rain is rare and irregular, but can be very heavy.</a:t>
             </a:r>
             <a:endParaRPr lang="en-US" sz="4000" dirty="0"/>
           </a:p>
@@ -10535,7 +10446,7 @@
                 <a:ea typeface="Calibri" pitchFamily="34" charset="-122"/>
                 <a:cs typeface="Calibri" pitchFamily="34" charset="-120"/>
               </a:rPr>
-              <a:t>2. TEMPERATURES</a:t>
+              <a:t>2. TEMPERATURE</a:t>
             </a:r>
             <a:endParaRPr lang="en-US" sz="1400" dirty="0"/>
           </a:p>
@@ -10637,7 +10548,7 @@
                 <a:ea typeface="Times New Roman" pitchFamily="34" charset="-122"/>
                 <a:cs typeface="Times New Roman" pitchFamily="34" charset="-120"/>
               </a:rPr>
-              <a:t>Aswan (Egypt): temperature in the day (red) and at night (blue).</a:t>
+              <a:t>Day and night temperatures of Aswan.</a:t>
             </a:r>
             <a:endParaRPr lang="en-US" sz="1800" dirty="0"/>
           </a:p>
@@ -10749,7 +10660,7 @@
                 <a:ea typeface="Calibri" pitchFamily="34" charset="-122"/>
                 <a:cs typeface="Calibri" pitchFamily="34" charset="-120"/>
               </a:rPr>
-              <a:t>2. TEMPERATURES</a:t>
+              <a:t>2. TEMPERATURE</a:t>
             </a:r>
             <a:endParaRPr lang="en-US" sz="1400" dirty="0"/>
           </a:p>
@@ -10856,7 +10767,7 @@
                 <a:ea typeface="Times New Roman" pitchFamily="34" charset="-122"/>
                 <a:cs typeface="Times New Roman" pitchFamily="34" charset="-120"/>
               </a:rPr>
-              <a:t>What is the temperature in July in the day and at night? What is the difference?</a:t>
+              <a:t>What is the difference between day and night in July?</a:t>
             </a:r>
             <a:endParaRPr lang="en-US" sz="4000" dirty="0"/>
           </a:p>
@@ -10968,7 +10879,7 @@
                 <a:ea typeface="Calibri" pitchFamily="34" charset="-122"/>
                 <a:cs typeface="Calibri" pitchFamily="34" charset="-120"/>
               </a:rPr>
-              <a:t>2. TEMPERATURES</a:t>
+              <a:t>2. TEMPERATURE</a:t>
             </a:r>
             <a:endParaRPr lang="en-US" sz="1400" dirty="0"/>
           </a:p>
@@ -11075,7 +10986,7 @@
                 <a:ea typeface="Times New Roman" pitchFamily="34" charset="-122"/>
                 <a:cs typeface="Times New Roman" pitchFamily="34" charset="-120"/>
               </a:rPr>
-              <a:t>Day 42 °C, night 26 °C. The difference is 16 °C.</a:t>
+              <a:t>42 − 26 = 16 °C.</a:t>
             </a:r>
             <a:endParaRPr lang="en-US" sz="4000" dirty="0"/>
           </a:p>
@@ -11187,7 +11098,7 @@
                 <a:ea typeface="Calibri" pitchFamily="34" charset="-122"/>
                 <a:cs typeface="Calibri" pitchFamily="34" charset="-120"/>
               </a:rPr>
-              <a:t>2. TEMPERATURES</a:t>
+              <a:t>2. TEMPERATURE</a:t>
             </a:r>
             <a:endParaRPr lang="en-US" sz="1400" dirty="0"/>
           </a:p>
@@ -11289,7 +11200,7 @@
                 <a:ea typeface="Times New Roman" pitchFamily="34" charset="-122"/>
                 <a:cs typeface="Times New Roman" pitchFamily="34" charset="-120"/>
               </a:rPr>
-              <a:t>Animation: the desert by day and at night.</a:t>
+              <a:t>Animation: the desert at night.</a:t>
             </a:r>
             <a:endParaRPr lang="en-US" sz="1800" dirty="0"/>
           </a:p>
@@ -11401,7 +11312,7 @@
                 <a:ea typeface="Calibri" pitchFamily="34" charset="-122"/>
                 <a:cs typeface="Calibri" pitchFamily="34" charset="-120"/>
               </a:rPr>
-              <a:t>2. TEMPERATURES</a:t>
+              <a:t>2. TEMPERATURE</a:t>
             </a:r>
             <a:endParaRPr lang="en-US" sz="1400" dirty="0"/>
           </a:p>
@@ -12629,7 +12540,7 @@
                 <a:ea typeface="Calibri" pitchFamily="34" charset="-122"/>
                 <a:cs typeface="Calibri" pitchFamily="34" charset="-120"/>
               </a:rPr>
-              <a:t>2. TEMPERATURES</a:t>
+              <a:t>2. TEMPERATURE</a:t>
             </a:r>
             <a:endParaRPr lang="en-US" sz="1400" dirty="0"/>
           </a:p>
@@ -12736,7 +12647,7 @@
                 <a:ea typeface="Times New Roman" pitchFamily="34" charset="-122"/>
                 <a:cs typeface="Times New Roman" pitchFamily="34" charset="-120"/>
               </a:rPr>
-              <a:t>There are no clouds, so the heat escapes into the sky.</a:t>
+              <a:t>There are no clouds, so the heat escapes.</a:t>
             </a:r>
             <a:endParaRPr lang="en-US" sz="4000" dirty="0"/>
           </a:p>
@@ -12950,7 +12861,7 @@
                 <a:ea typeface="Times New Roman" pitchFamily="34" charset="-122"/>
                 <a:cs typeface="Times New Roman" pitchFamily="34" charset="-120"/>
               </a:rPr>
-              <a:t>A sandstorm arrives.</a:t>
+              <a:t>A sandstorm.</a:t>
             </a:r>
             <a:endParaRPr lang="en-US" sz="1800" dirty="0"/>
           </a:p>
@@ -13169,7 +13080,7 @@
                 <a:ea typeface="Times New Roman" pitchFamily="34" charset="-122"/>
                 <a:cs typeface="Times New Roman" pitchFamily="34" charset="-120"/>
               </a:rPr>
-              <a:t>What is this? Give one danger.</a:t>
+              <a:t>What is this?</a:t>
             </a:r>
             <a:endParaRPr lang="en-US" sz="4000" dirty="0"/>
           </a:p>
@@ -13388,7 +13299,7 @@
                 <a:ea typeface="Times New Roman" pitchFamily="34" charset="-122"/>
                 <a:cs typeface="Times New Roman" pitchFamily="34" charset="-120"/>
               </a:rPr>
-              <a:t>A sandstorm. People cannot see, and it hurts the eyes and lungs.</a:t>
+              <a:t>A sandstorm.</a:t>
             </a:r>
             <a:endParaRPr lang="en-US" sz="4000" dirty="0"/>
           </a:p>
@@ -13782,7 +13693,7 @@
         <p:spPr>
           <a:xfrm>
             <a:off x="0" y="658368"/>
-            <a:ext cx="3840480" cy="5833872"/>
+            <a:ext cx="5120640" cy="5833872"/>
           </a:xfrm>
           <a:prstGeom prst="rect">
             <a:avLst/>
@@ -13797,8 +13708,8 @@
         </p:nvSpPr>
         <p:spPr>
           <a:xfrm>
-            <a:off x="4069080" y="1005840"/>
-            <a:ext cx="7802575" cy="731520"/>
+            <a:off x="5349240" y="1005840"/>
+            <a:ext cx="6522415" cy="731520"/>
           </a:xfrm>
           <a:prstGeom prst="rect">
             <a:avLst/>
@@ -13838,8 +13749,8 @@
         </p:nvSpPr>
         <p:spPr>
           <a:xfrm>
-            <a:off x="4069080" y="1783080"/>
-            <a:ext cx="7802575" cy="4663440"/>
+            <a:off x="5349240" y="1783080"/>
+            <a:ext cx="6522415" cy="4663440"/>
           </a:xfrm>
           <a:prstGeom prst="rect">
             <a:avLst/>
@@ -13871,11 +13782,12 @@
             <a:endParaRPr lang="en-US" sz="4000" dirty="0"/>
           </a:p>
           <a:p>
-            <a:pPr algn="l" indent="0" marL="0">
+            <a:pPr algn="l" marL="342900" indent="-342900">
               <a:spcAft>
                 <a:spcPts val="800"/>
               </a:spcAft>
-              <a:buNone/>
+              <a:buSzPct val="100000"/>
+              <a:buChar char="•"/>
             </a:pPr>
             <a:r>
               <a:rPr lang="en-US" sz="4000" b="1" dirty="0">
@@ -13886,13 +13798,14 @@
                 <a:ea typeface="Times New Roman" pitchFamily="34" charset="-122"/>
                 <a:cs typeface="Times New Roman" pitchFamily="34" charset="-120"/>
               </a:rPr>
-              <a:t>Daily temperature range: </a:t>
-            </a:r>
-            <a:pPr algn="l" indent="0" marL="0">
+              <a:t>Daily range of temperature: </a:t>
+            </a:r>
+            <a:pPr algn="l" marL="342900" indent="-342900">
               <a:spcAft>
                 <a:spcPts val="800"/>
               </a:spcAft>
-              <a:buNone/>
+              <a:buSzPct val="100000"/>
+              <a:buChar char="•"/>
             </a:pPr>
             <a:r>
               <a:rPr lang="en-US" sz="4000" dirty="0">
@@ -13904,43 +13817,6 @@
                 <a:cs typeface="Times New Roman" pitchFamily="34" charset="-120"/>
               </a:rPr>
               <a:t>It is the difference between the day and the night temperatures.</a:t>
-            </a:r>
-            <a:endParaRPr lang="en-US" sz="4000" dirty="0"/>
-          </a:p>
-          <a:p>
-            <a:pPr algn="l" indent="0" marL="0">
-              <a:spcAft>
-                <a:spcPts val="800"/>
-              </a:spcAft>
-              <a:buNone/>
-            </a:pPr>
-            <a:r>
-              <a:rPr lang="en-US" sz="4000" b="1" dirty="0">
-                <a:solidFill>
-                  <a:srgbClr val="111111"/>
-                </a:solidFill>
-                <a:latin typeface="Times New Roman" pitchFamily="34" charset="0"/>
-                <a:ea typeface="Times New Roman" pitchFamily="34" charset="-122"/>
-                <a:cs typeface="Times New Roman" pitchFamily="34" charset="-120"/>
-              </a:rPr>
-              <a:t>Sandstorm: </a:t>
-            </a:r>
-            <a:pPr algn="l" indent="0" marL="0">
-              <a:spcAft>
-                <a:spcPts val="800"/>
-              </a:spcAft>
-              <a:buNone/>
-            </a:pPr>
-            <a:r>
-              <a:rPr lang="en-US" sz="4000" dirty="0">
-                <a:solidFill>
-                  <a:srgbClr val="111111"/>
-                </a:solidFill>
-                <a:latin typeface="Times New Roman" pitchFamily="34" charset="0"/>
-                <a:ea typeface="Times New Roman" pitchFamily="34" charset="-122"/>
-                <a:cs typeface="Times New Roman" pitchFamily="34" charset="-120"/>
-              </a:rPr>
-              <a:t>It is a strong wind that lifts sand into the air.</a:t>
             </a:r>
             <a:endParaRPr lang="en-US" sz="4000" dirty="0"/>
           </a:p>
@@ -14058,9 +13934,131 @@
           </a:p>
         </p:txBody>
       </p:sp>
+      <p:sp>
+        <p:nvSpPr>
+          <p:cNvPr id="3" name="Text 1"/>
+          <p:cNvSpPr/>
+          <p:nvPr/>
+        </p:nvSpPr>
+        <p:spPr>
+          <a:xfrm>
+            <a:off x="365760" y="1005840"/>
+            <a:ext cx="11460175" cy="731520"/>
+          </a:xfrm>
+          <a:prstGeom prst="rect">
+            <a:avLst/>
+          </a:prstGeom>
+          <a:noFill/>
+          <a:ln/>
+        </p:spPr>
+        <p:txBody>
+          <a:bodyPr wrap="square" lIns="0" tIns="0" rIns="0" bIns="0" rtlCol="0" anchor="ctr">
+            <a:normAutofit/>
+          </a:bodyPr>
+          <a:lstStyle/>
+          <a:p>
+            <a:pPr algn="ctr" indent="0" marL="0">
+              <a:buNone/>
+            </a:pPr>
+            <a:r>
+              <a:rPr lang="en-US" sz="3600" b="1" dirty="0">
+                <a:solidFill>
+                  <a:srgbClr val="990011"/>
+                </a:solidFill>
+                <a:latin typeface="Times New Roman" pitchFamily="34" charset="0"/>
+                <a:ea typeface="Times New Roman" pitchFamily="34" charset="-122"/>
+                <a:cs typeface="Times New Roman" pitchFamily="34" charset="-120"/>
+              </a:rPr>
+              <a:t>1. Rainfall</a:t>
+            </a:r>
+            <a:endParaRPr lang="en-US" sz="3600" dirty="0"/>
+          </a:p>
+        </p:txBody>
+      </p:sp>
+      <p:sp>
+        <p:nvSpPr>
+          <p:cNvPr id="4" name="Text 2"/>
+          <p:cNvSpPr/>
+          <p:nvPr/>
+        </p:nvSpPr>
+        <p:spPr>
+          <a:xfrm>
+            <a:off x="365760" y="1783080"/>
+            <a:ext cx="4846320" cy="4617720"/>
+          </a:xfrm>
+          <a:prstGeom prst="rect">
+            <a:avLst/>
+          </a:prstGeom>
+          <a:noFill/>
+          <a:ln/>
+        </p:spPr>
+        <p:txBody>
+          <a:bodyPr wrap="square" lIns="0" tIns="0" rIns="0" bIns="0" rtlCol="0" anchor="t"/>
+          <a:lstStyle/>
+          <a:p>
+            <a:pPr algn="l" indent="0" marL="0">
+              <a:spcAft>
+                <a:spcPts val="800"/>
+              </a:spcAft>
+              <a:buNone/>
+            </a:pPr>
+            <a:r>
+              <a:rPr lang="en-US" sz="3600" i="1" dirty="0">
+                <a:solidFill>
+                  <a:srgbClr val="111111"/>
+                </a:solidFill>
+                <a:latin typeface="Times New Roman" pitchFamily="34" charset="0"/>
+                <a:ea typeface="Times New Roman" pitchFamily="34" charset="-122"/>
+                <a:cs typeface="Times New Roman" pitchFamily="34" charset="-120"/>
+              </a:rPr>
+              <a:t>Desert rainfall has the following characteristics:</a:t>
+            </a:r>
+            <a:endParaRPr lang="en-US" sz="3600" dirty="0"/>
+          </a:p>
+          <a:p>
+            <a:pPr algn="l" marL="342900" indent="-342900">
+              <a:spcAft>
+                <a:spcPts val="800"/>
+              </a:spcAft>
+              <a:buSzPct val="100000"/>
+              <a:buChar char="•"/>
+            </a:pPr>
+            <a:r>
+              <a:rPr lang="en-US" sz="3600" b="1" dirty="0">
+                <a:solidFill>
+                  <a:srgbClr val="111111"/>
+                </a:solidFill>
+                <a:latin typeface="Times New Roman" pitchFamily="34" charset="0"/>
+                <a:ea typeface="Times New Roman" pitchFamily="34" charset="-122"/>
+                <a:cs typeface="Times New Roman" pitchFamily="34" charset="-120"/>
+              </a:rPr>
+              <a:t>Very little rain: </a:t>
+            </a:r>
+            <a:pPr algn="l" marL="342900" indent="-342900">
+              <a:spcAft>
+                <a:spcPts val="800"/>
+              </a:spcAft>
+              <a:buSzPct val="100000"/>
+              <a:buChar char="•"/>
+            </a:pPr>
+            <a:r>
+              <a:rPr lang="en-US" sz="3600" dirty="0">
+                <a:solidFill>
+                  <a:srgbClr val="111111"/>
+                </a:solidFill>
+                <a:latin typeface="Times New Roman" pitchFamily="34" charset="0"/>
+                <a:ea typeface="Times New Roman" pitchFamily="34" charset="-122"/>
+                <a:cs typeface="Times New Roman" pitchFamily="34" charset="-120"/>
+              </a:rPr>
+              <a:t>Less than 250 mm per year.</a:t>
+            </a:r>
+            <a:endParaRPr lang="en-US" sz="3600" dirty="0"/>
+          </a:p>
+        </p:txBody>
+      </p:sp>
       <p:pic>
         <p:nvPicPr>
-          <p:cNvPr id="3" name="Image 0" descr="/home/claude/f4/img/minesec_sheet.png">    </p:cNvPr>
+          <p:cNvPr id="5" name="Image 0" descr="/home/claude/f4/img/v2/rain_compare_big.png">    </p:cNvPr>
           <p:cNvPicPr>
             <a:picLocks noChangeAspect="1"/>
           </p:cNvPicPr>
@@ -14074,8 +14072,8 @@
         </p:blipFill>
         <p:spPr>
           <a:xfrm>
-            <a:off x="0" y="658368"/>
-            <a:ext cx="2468880" cy="5833872"/>
+            <a:off x="5349240" y="2513450"/>
+            <a:ext cx="6659575" cy="2809508"/>
           </a:xfrm>
           <a:prstGeom prst="rect">
             <a:avLst/>
@@ -14084,14 +14082,14 @@
       </p:pic>
       <p:sp>
         <p:nvSpPr>
-          <p:cNvPr id="4" name="Text 1"/>
+          <p:cNvPr id="6" name="Text 3"/>
           <p:cNvSpPr/>
           <p:nvPr/>
         </p:nvSpPr>
         <p:spPr>
           <a:xfrm>
-            <a:off x="2697480" y="1005840"/>
-            <a:ext cx="9174175" cy="731520"/>
+            <a:off x="5349240" y="6089904"/>
+            <a:ext cx="6659575" cy="347472"/>
           </a:xfrm>
           <a:prstGeom prst="rect">
             <a:avLst/>
@@ -14100,142 +14098,24 @@
           <a:ln/>
         </p:spPr>
         <p:txBody>
-          <a:bodyPr wrap="square" lIns="0" tIns="0" rIns="0" bIns="0" rtlCol="0" anchor="ctr">
-            <a:normAutofit/>
-          </a:bodyPr>
+          <a:bodyPr wrap="square" lIns="0" tIns="0" rIns="0" bIns="0" rtlCol="0" anchor="ctr"/>
           <a:lstStyle/>
           <a:p>
             <a:pPr algn="ctr" indent="0" marL="0">
               <a:buNone/>
             </a:pPr>
             <a:r>
-              <a:rPr lang="en-US" sz="3600" b="1" dirty="0">
-                <a:solidFill>
-                  <a:srgbClr val="990011"/>
+              <a:rPr lang="en-US" sz="1600" i="1" dirty="0">
+                <a:solidFill>
+                  <a:srgbClr val="555555"/>
                 </a:solidFill>
                 <a:latin typeface="Times New Roman" pitchFamily="34" charset="0"/>
                 <a:ea typeface="Times New Roman" pitchFamily="34" charset="-122"/>
                 <a:cs typeface="Times New Roman" pitchFamily="34" charset="-120"/>
               </a:rPr>
-              <a:t>1. Rainfall</a:t>
-            </a:r>
-            <a:endParaRPr lang="en-US" sz="3600" dirty="0"/>
-          </a:p>
-        </p:txBody>
-      </p:sp>
-      <p:sp>
-        <p:nvSpPr>
-          <p:cNvPr id="5" name="Text 2"/>
-          <p:cNvSpPr/>
-          <p:nvPr/>
-        </p:nvSpPr>
-        <p:spPr>
-          <a:xfrm>
-            <a:off x="2697480" y="1783080"/>
-            <a:ext cx="9174175" cy="4663440"/>
-          </a:xfrm>
-          <a:prstGeom prst="rect">
-            <a:avLst/>
-          </a:prstGeom>
-          <a:noFill/>
-          <a:ln/>
-        </p:spPr>
-        <p:txBody>
-          <a:bodyPr wrap="square" lIns="0" tIns="0" rIns="0" bIns="0" rtlCol="0" anchor="t"/>
-          <a:lstStyle/>
-          <a:p>
-            <a:pPr algn="l" indent="0" marL="0">
-              <a:spcAft>
-                <a:spcPts val="800"/>
-              </a:spcAft>
-              <a:buNone/>
-            </a:pPr>
-            <a:r>
-              <a:rPr lang="en-US" sz="4000" i="1" dirty="0">
-                <a:solidFill>
-                  <a:srgbClr val="111111"/>
-                </a:solidFill>
-                <a:latin typeface="Times New Roman" pitchFamily="34" charset="0"/>
-                <a:ea typeface="Times New Roman" pitchFamily="34" charset="-122"/>
-                <a:cs typeface="Times New Roman" pitchFamily="34" charset="-120"/>
-              </a:rPr>
-              <a:t>Rainfall in hot deserts has the following characteristics:</a:t>
-            </a:r>
-            <a:endParaRPr lang="en-US" sz="4000" dirty="0"/>
-          </a:p>
-          <a:p>
-            <a:pPr algn="l" indent="0" marL="0">
-              <a:spcAft>
-                <a:spcPts val="800"/>
-              </a:spcAft>
-              <a:buNone/>
-            </a:pPr>
-            <a:r>
-              <a:rPr lang="en-US" sz="4000" b="1" dirty="0">
-                <a:solidFill>
-                  <a:srgbClr val="111111"/>
-                </a:solidFill>
-                <a:latin typeface="Times New Roman" pitchFamily="34" charset="0"/>
-                <a:ea typeface="Times New Roman" pitchFamily="34" charset="-122"/>
-                <a:cs typeface="Times New Roman" pitchFamily="34" charset="-120"/>
-              </a:rPr>
-              <a:t>Very little rain: </a:t>
-            </a:r>
-            <a:pPr algn="l" indent="0" marL="0">
-              <a:spcAft>
-                <a:spcPts val="800"/>
-              </a:spcAft>
-              <a:buNone/>
-            </a:pPr>
-            <a:r>
-              <a:rPr lang="en-US" sz="4000" dirty="0">
-                <a:solidFill>
-                  <a:srgbClr val="111111"/>
-                </a:solidFill>
-                <a:latin typeface="Times New Roman" pitchFamily="34" charset="0"/>
-                <a:ea typeface="Times New Roman" pitchFamily="34" charset="-122"/>
-                <a:cs typeface="Times New Roman" pitchFamily="34" charset="-120"/>
-              </a:rPr>
-              <a:t>Hot deserts receive less than 250 mm of rain per year.</a:t>
-            </a:r>
-            <a:endParaRPr lang="en-US" sz="4000" dirty="0"/>
-          </a:p>
-          <a:p>
-            <a:pPr algn="l" indent="0" marL="0">
-              <a:spcAft>
-                <a:spcPts val="800"/>
-              </a:spcAft>
-              <a:buNone/>
-            </a:pPr>
-            <a:r>
-              <a:rPr lang="en-US" sz="4000" b="1" dirty="0">
-                <a:solidFill>
-                  <a:srgbClr val="111111"/>
-                </a:solidFill>
-                <a:latin typeface="Times New Roman" pitchFamily="34" charset="0"/>
-                <a:ea typeface="Times New Roman" pitchFamily="34" charset="-122"/>
-                <a:cs typeface="Times New Roman" pitchFamily="34" charset="-120"/>
-              </a:rPr>
-              <a:t>Irregular rain: </a:t>
-            </a:r>
-            <a:pPr algn="l" indent="0" marL="0">
-              <a:spcAft>
-                <a:spcPts val="800"/>
-              </a:spcAft>
-              <a:buNone/>
-            </a:pPr>
-            <a:r>
-              <a:rPr lang="en-US" sz="4000" dirty="0">
-                <a:solidFill>
-                  <a:srgbClr val="111111"/>
-                </a:solidFill>
-                <a:latin typeface="Times New Roman" pitchFamily="34" charset="0"/>
-                <a:ea typeface="Times New Roman" pitchFamily="34" charset="-122"/>
-                <a:cs typeface="Times New Roman" pitchFamily="34" charset="-120"/>
-              </a:rPr>
-              <a:t>The rain is unreliable and may not fall for years.</a:t>
-            </a:r>
-            <a:endParaRPr lang="en-US" sz="4000" dirty="0"/>
+              <a:t>Illustration: rainfall of Aswan and Garoua</a:t>
+            </a:r>
+            <a:endParaRPr lang="en-US" sz="1600" dirty="0"/>
           </a:p>
         </p:txBody>
       </p:sp>
@@ -14410,7 +14290,7 @@
                 <a:ea typeface="Times New Roman" pitchFamily="34" charset="-122"/>
                 <a:cs typeface="Times New Roman" pitchFamily="34" charset="-120"/>
               </a:rPr>
-              <a:t>1. Rainfall (continued)</a:t>
+              <a:t>1. Rainfall</a:t>
             </a:r>
             <a:endParaRPr lang="en-US" sz="3600" dirty="0"/>
           </a:p>
@@ -14437,11 +14317,12 @@
           <a:bodyPr wrap="square" lIns="0" tIns="0" rIns="0" bIns="0" rtlCol="0" anchor="t"/>
           <a:lstStyle/>
           <a:p>
-            <a:pPr algn="l" indent="0" marL="0">
+            <a:pPr algn="l" marL="342900" indent="-342900">
               <a:spcAft>
                 <a:spcPts val="800"/>
               </a:spcAft>
-              <a:buNone/>
+              <a:buSzPct val="100000"/>
+              <a:buChar char="•"/>
             </a:pPr>
             <a:r>
               <a:rPr lang="en-US" sz="4000" b="1" dirty="0">
@@ -14452,13 +14333,14 @@
                 <a:ea typeface="Times New Roman" pitchFamily="34" charset="-122"/>
                 <a:cs typeface="Times New Roman" pitchFamily="34" charset="-120"/>
               </a:rPr>
-              <a:t>Clear skies: </a:t>
-            </a:r>
-            <a:pPr algn="l" indent="0" marL="0">
+              <a:t>Irregular rain: </a:t>
+            </a:r>
+            <a:pPr algn="l" marL="342900" indent="-342900">
               <a:spcAft>
                 <a:spcPts val="800"/>
               </a:spcAft>
-              <a:buNone/>
+              <a:buSzPct val="100000"/>
+              <a:buChar char="•"/>
             </a:pPr>
             <a:r>
               <a:rPr lang="en-US" sz="4000" dirty="0">
@@ -14469,7 +14351,46 @@
                 <a:ea typeface="Times New Roman" pitchFamily="34" charset="-122"/>
                 <a:cs typeface="Times New Roman" pitchFamily="34" charset="-120"/>
               </a:rPr>
-              <a:t>There are almost no clouds in the sky.</a:t>
+              <a:t>It may not rain for years.</a:t>
+            </a:r>
+            <a:endParaRPr lang="en-US" sz="4000" dirty="0"/>
+          </a:p>
+          <a:p>
+            <a:pPr algn="l" marL="342900" indent="-342900">
+              <a:spcAft>
+                <a:spcPts val="800"/>
+              </a:spcAft>
+              <a:buSzPct val="100000"/>
+              <a:buChar char="•"/>
+            </a:pPr>
+            <a:r>
+              <a:rPr lang="en-US" sz="4000" b="1" dirty="0">
+                <a:solidFill>
+                  <a:srgbClr val="111111"/>
+                </a:solidFill>
+                <a:latin typeface="Times New Roman" pitchFamily="34" charset="0"/>
+                <a:ea typeface="Times New Roman" pitchFamily="34" charset="-122"/>
+                <a:cs typeface="Times New Roman" pitchFamily="34" charset="-120"/>
+              </a:rPr>
+              <a:t>Sudden storms: </a:t>
+            </a:r>
+            <a:pPr algn="l" marL="342900" indent="-342900">
+              <a:spcAft>
+                <a:spcPts val="800"/>
+              </a:spcAft>
+              <a:buSzPct val="100000"/>
+              <a:buChar char="•"/>
+            </a:pPr>
+            <a:r>
+              <a:rPr lang="en-US" sz="4000" dirty="0">
+                <a:solidFill>
+                  <a:srgbClr val="111111"/>
+                </a:solidFill>
+                <a:latin typeface="Times New Roman" pitchFamily="34" charset="0"/>
+                <a:ea typeface="Times New Roman" pitchFamily="34" charset="-122"/>
+                <a:cs typeface="Times New Roman" pitchFamily="34" charset="-120"/>
+              </a:rPr>
+              <a:t>Rare storms cause floods in dry valleys.</a:t>
             </a:r>
             <a:endParaRPr lang="en-US" sz="4000" dirty="0"/>
           </a:p>
@@ -14587,9 +14508,131 @@
           </a:p>
         </p:txBody>
       </p:sp>
+      <p:sp>
+        <p:nvSpPr>
+          <p:cNvPr id="3" name="Text 1"/>
+          <p:cNvSpPr/>
+          <p:nvPr/>
+        </p:nvSpPr>
+        <p:spPr>
+          <a:xfrm>
+            <a:off x="365760" y="1005840"/>
+            <a:ext cx="11460175" cy="731520"/>
+          </a:xfrm>
+          <a:prstGeom prst="rect">
+            <a:avLst/>
+          </a:prstGeom>
+          <a:noFill/>
+          <a:ln/>
+        </p:spPr>
+        <p:txBody>
+          <a:bodyPr wrap="square" lIns="0" tIns="0" rIns="0" bIns="0" rtlCol="0" anchor="ctr">
+            <a:normAutofit/>
+          </a:bodyPr>
+          <a:lstStyle/>
+          <a:p>
+            <a:pPr algn="ctr" indent="0" marL="0">
+              <a:buNone/>
+            </a:pPr>
+            <a:r>
+              <a:rPr lang="en-US" sz="3600" b="1" dirty="0">
+                <a:solidFill>
+                  <a:srgbClr val="990011"/>
+                </a:solidFill>
+                <a:latin typeface="Times New Roman" pitchFamily="34" charset="0"/>
+                <a:ea typeface="Times New Roman" pitchFamily="34" charset="-122"/>
+                <a:cs typeface="Times New Roman" pitchFamily="34" charset="-120"/>
+              </a:rPr>
+              <a:t>2. Temperature</a:t>
+            </a:r>
+            <a:endParaRPr lang="en-US" sz="3600" dirty="0"/>
+          </a:p>
+        </p:txBody>
+      </p:sp>
+      <p:sp>
+        <p:nvSpPr>
+          <p:cNvPr id="4" name="Text 2"/>
+          <p:cNvSpPr/>
+          <p:nvPr/>
+        </p:nvSpPr>
+        <p:spPr>
+          <a:xfrm>
+            <a:off x="365760" y="1783080"/>
+            <a:ext cx="4846320" cy="4617720"/>
+          </a:xfrm>
+          <a:prstGeom prst="rect">
+            <a:avLst/>
+          </a:prstGeom>
+          <a:noFill/>
+          <a:ln/>
+        </p:spPr>
+        <p:txBody>
+          <a:bodyPr wrap="square" lIns="0" tIns="0" rIns="0" bIns="0" rtlCol="0" anchor="t"/>
+          <a:lstStyle/>
+          <a:p>
+            <a:pPr algn="l" indent="0" marL="0">
+              <a:spcAft>
+                <a:spcPts val="800"/>
+              </a:spcAft>
+              <a:buNone/>
+            </a:pPr>
+            <a:r>
+              <a:rPr lang="en-US" sz="3600" i="1" dirty="0">
+                <a:solidFill>
+                  <a:srgbClr val="111111"/>
+                </a:solidFill>
+                <a:latin typeface="Times New Roman" pitchFamily="34" charset="0"/>
+                <a:ea typeface="Times New Roman" pitchFamily="34" charset="-122"/>
+                <a:cs typeface="Times New Roman" pitchFamily="34" charset="-120"/>
+              </a:rPr>
+              <a:t>Desert temperatures have the following characteristics:</a:t>
+            </a:r>
+            <a:endParaRPr lang="en-US" sz="3600" dirty="0"/>
+          </a:p>
+          <a:p>
+            <a:pPr algn="l" marL="342900" indent="-342900">
+              <a:spcAft>
+                <a:spcPts val="800"/>
+              </a:spcAft>
+              <a:buSzPct val="100000"/>
+              <a:buChar char="•"/>
+            </a:pPr>
+            <a:r>
+              <a:rPr lang="en-US" sz="3600" b="1" dirty="0">
+                <a:solidFill>
+                  <a:srgbClr val="111111"/>
+                </a:solidFill>
+                <a:latin typeface="Times New Roman" pitchFamily="34" charset="0"/>
+                <a:ea typeface="Times New Roman" pitchFamily="34" charset="-122"/>
+                <a:cs typeface="Times New Roman" pitchFamily="34" charset="-120"/>
+              </a:rPr>
+              <a:t>Very hot days: </a:t>
+            </a:r>
+            <a:pPr algn="l" marL="342900" indent="-342900">
+              <a:spcAft>
+                <a:spcPts val="800"/>
+              </a:spcAft>
+              <a:buSzPct val="100000"/>
+              <a:buChar char="•"/>
+            </a:pPr>
+            <a:r>
+              <a:rPr lang="en-US" sz="3600" dirty="0">
+                <a:solidFill>
+                  <a:srgbClr val="111111"/>
+                </a:solidFill>
+                <a:latin typeface="Times New Roman" pitchFamily="34" charset="0"/>
+                <a:ea typeface="Times New Roman" pitchFamily="34" charset="-122"/>
+                <a:cs typeface="Times New Roman" pitchFamily="34" charset="-120"/>
+              </a:rPr>
+              <a:t>Often more than 40 °C in summer.</a:t>
+            </a:r>
+            <a:endParaRPr lang="en-US" sz="3600" dirty="0"/>
+          </a:p>
+        </p:txBody>
+      </p:sp>
       <p:pic>
         <p:nvPicPr>
-          <p:cNvPr id="3" name="Image 0" descr="/home/claude/f4/img/minesec_sheet.png">    </p:cNvPr>
+          <p:cNvPr id="5" name="Image 0" descr="/home/claude/f4/img/v2/aswan_temp_big.png">    </p:cNvPr>
           <p:cNvPicPr>
             <a:picLocks noChangeAspect="1"/>
           </p:cNvPicPr>
@@ -14603,8 +14646,8 @@
         </p:blipFill>
         <p:spPr>
           <a:xfrm>
-            <a:off x="0" y="658368"/>
-            <a:ext cx="1463040" cy="5833872"/>
+            <a:off x="5349240" y="2461422"/>
+            <a:ext cx="6659575" cy="2913564"/>
           </a:xfrm>
           <a:prstGeom prst="rect">
             <a:avLst/>
@@ -14613,14 +14656,14 @@
       </p:pic>
       <p:sp>
         <p:nvSpPr>
-          <p:cNvPr id="4" name="Text 1"/>
+          <p:cNvPr id="6" name="Text 3"/>
           <p:cNvSpPr/>
           <p:nvPr/>
         </p:nvSpPr>
         <p:spPr>
           <a:xfrm>
-            <a:off x="1691640" y="1005840"/>
-            <a:ext cx="10180015" cy="731520"/>
+            <a:off x="5349240" y="6089904"/>
+            <a:ext cx="6659575" cy="347472"/>
           </a:xfrm>
           <a:prstGeom prst="rect">
             <a:avLst/>
@@ -14629,142 +14672,24 @@
           <a:ln/>
         </p:spPr>
         <p:txBody>
-          <a:bodyPr wrap="square" lIns="0" tIns="0" rIns="0" bIns="0" rtlCol="0" anchor="ctr">
-            <a:normAutofit/>
-          </a:bodyPr>
+          <a:bodyPr wrap="square" lIns="0" tIns="0" rIns="0" bIns="0" rtlCol="0" anchor="ctr"/>
           <a:lstStyle/>
           <a:p>
             <a:pPr algn="ctr" indent="0" marL="0">
               <a:buNone/>
             </a:pPr>
             <a:r>
-              <a:rPr lang="en-US" sz="3600" b="1" dirty="0">
-                <a:solidFill>
-                  <a:srgbClr val="990011"/>
+              <a:rPr lang="en-US" sz="1600" i="1" dirty="0">
+                <a:solidFill>
+                  <a:srgbClr val="555555"/>
                 </a:solidFill>
                 <a:latin typeface="Times New Roman" pitchFamily="34" charset="0"/>
                 <a:ea typeface="Times New Roman" pitchFamily="34" charset="-122"/>
                 <a:cs typeface="Times New Roman" pitchFamily="34" charset="-120"/>
               </a:rPr>
-              <a:t>2. Temperatures</a:t>
-            </a:r>
-            <a:endParaRPr lang="en-US" sz="3600" dirty="0"/>
-          </a:p>
-        </p:txBody>
-      </p:sp>
-      <p:sp>
-        <p:nvSpPr>
-          <p:cNvPr id="5" name="Text 2"/>
-          <p:cNvSpPr/>
-          <p:nvPr/>
-        </p:nvSpPr>
-        <p:spPr>
-          <a:xfrm>
-            <a:off x="1691640" y="1783080"/>
-            <a:ext cx="10180015" cy="4663440"/>
-          </a:xfrm>
-          <a:prstGeom prst="rect">
-            <a:avLst/>
-          </a:prstGeom>
-          <a:noFill/>
-          <a:ln/>
-        </p:spPr>
-        <p:txBody>
-          <a:bodyPr wrap="square" lIns="0" tIns="0" rIns="0" bIns="0" rtlCol="0" anchor="t"/>
-          <a:lstStyle/>
-          <a:p>
-            <a:pPr algn="l" indent="0" marL="0">
-              <a:spcAft>
-                <a:spcPts val="800"/>
-              </a:spcAft>
-              <a:buNone/>
-            </a:pPr>
-            <a:r>
-              <a:rPr lang="en-US" sz="4000" i="1" dirty="0">
-                <a:solidFill>
-                  <a:srgbClr val="111111"/>
-                </a:solidFill>
-                <a:latin typeface="Times New Roman" pitchFamily="34" charset="0"/>
-                <a:ea typeface="Times New Roman" pitchFamily="34" charset="-122"/>
-                <a:cs typeface="Times New Roman" pitchFamily="34" charset="-120"/>
-              </a:rPr>
-              <a:t>Temperatures in hot deserts, as at Aswan in Egypt, have the following characteristics:</a:t>
-            </a:r>
-            <a:endParaRPr lang="en-US" sz="4000" dirty="0"/>
-          </a:p>
-          <a:p>
-            <a:pPr algn="l" indent="0" marL="0">
-              <a:spcAft>
-                <a:spcPts val="800"/>
-              </a:spcAft>
-              <a:buNone/>
-            </a:pPr>
-            <a:r>
-              <a:rPr lang="en-US" sz="4000" b="1" dirty="0">
-                <a:solidFill>
-                  <a:srgbClr val="111111"/>
-                </a:solidFill>
-                <a:latin typeface="Times New Roman" pitchFamily="34" charset="0"/>
-                <a:ea typeface="Times New Roman" pitchFamily="34" charset="-122"/>
-                <a:cs typeface="Times New Roman" pitchFamily="34" charset="-120"/>
-              </a:rPr>
-              <a:t>Hot days: </a:t>
-            </a:r>
-            <a:pPr algn="l" indent="0" marL="0">
-              <a:spcAft>
-                <a:spcPts val="800"/>
-              </a:spcAft>
-              <a:buNone/>
-            </a:pPr>
-            <a:r>
-              <a:rPr lang="en-US" sz="4000" dirty="0">
-                <a:solidFill>
-                  <a:srgbClr val="111111"/>
-                </a:solidFill>
-                <a:latin typeface="Times New Roman" pitchFamily="34" charset="0"/>
-                <a:ea typeface="Times New Roman" pitchFamily="34" charset="-122"/>
-                <a:cs typeface="Times New Roman" pitchFamily="34" charset="-120"/>
-              </a:rPr>
-              <a:t>Day temperatures are often above 40 °C.</a:t>
-            </a:r>
-            <a:endParaRPr lang="en-US" sz="4000" dirty="0"/>
-          </a:p>
-          <a:p>
-            <a:pPr algn="l" indent="0" marL="0">
-              <a:spcAft>
-                <a:spcPts val="800"/>
-              </a:spcAft>
-              <a:buNone/>
-            </a:pPr>
-            <a:r>
-              <a:rPr lang="en-US" sz="4000" b="1" dirty="0">
-                <a:solidFill>
-                  <a:srgbClr val="111111"/>
-                </a:solidFill>
-                <a:latin typeface="Times New Roman" pitchFamily="34" charset="0"/>
-                <a:ea typeface="Times New Roman" pitchFamily="34" charset="-122"/>
-                <a:cs typeface="Times New Roman" pitchFamily="34" charset="-120"/>
-              </a:rPr>
-              <a:t>Cold nights: </a:t>
-            </a:r>
-            <a:pPr algn="l" indent="0" marL="0">
-              <a:spcAft>
-                <a:spcPts val="800"/>
-              </a:spcAft>
-              <a:buNone/>
-            </a:pPr>
-            <a:r>
-              <a:rPr lang="en-US" sz="4000" dirty="0">
-                <a:solidFill>
-                  <a:srgbClr val="111111"/>
-                </a:solidFill>
-                <a:latin typeface="Times New Roman" pitchFamily="34" charset="0"/>
-                <a:ea typeface="Times New Roman" pitchFamily="34" charset="-122"/>
-                <a:cs typeface="Times New Roman" pitchFamily="34" charset="-120"/>
-              </a:rPr>
-              <a:t>The nights are cold because the heat escapes quickly under clear skies.</a:t>
-            </a:r>
-            <a:endParaRPr lang="en-US" sz="4000" dirty="0"/>
+              <a:t>Illustration: temperatures of Aswan</a:t>
+            </a:r>
+            <a:endParaRPr lang="en-US" sz="1600" dirty="0"/>
           </a:p>
         </p:txBody>
       </p:sp>
@@ -14939,7 +14864,7 @@
                 <a:ea typeface="Times New Roman" pitchFamily="34" charset="-122"/>
                 <a:cs typeface="Times New Roman" pitchFamily="34" charset="-120"/>
               </a:rPr>
-              <a:t>2. Temperatures (continued)</a:t>
+              <a:t>2. Temperature</a:t>
             </a:r>
             <a:endParaRPr lang="en-US" sz="3600" dirty="0"/>
           </a:p>
@@ -14966,11 +14891,51 @@
           <a:bodyPr wrap="square" lIns="0" tIns="0" rIns="0" bIns="0" rtlCol="0" anchor="t"/>
           <a:lstStyle/>
           <a:p>
-            <a:pPr algn="l" indent="0" marL="0">
+            <a:pPr algn="l" marL="342900" indent="-342900">
               <a:spcAft>
                 <a:spcPts val="800"/>
               </a:spcAft>
-              <a:buNone/>
+              <a:buSzPct val="100000"/>
+              <a:buChar char="•"/>
+            </a:pPr>
+            <a:r>
+              <a:rPr lang="en-US" sz="4000" b="1" dirty="0">
+                <a:solidFill>
+                  <a:srgbClr val="111111"/>
+                </a:solidFill>
+                <a:latin typeface="Times New Roman" pitchFamily="34" charset="0"/>
+                <a:ea typeface="Times New Roman" pitchFamily="34" charset="-122"/>
+                <a:cs typeface="Times New Roman" pitchFamily="34" charset="-120"/>
+              </a:rPr>
+              <a:t>Cold nights: </a:t>
+            </a:r>
+            <a:pPr algn="l" marL="342900" indent="-342900">
+              <a:spcAft>
+                <a:spcPts val="800"/>
+              </a:spcAft>
+              <a:buSzPct val="100000"/>
+              <a:buChar char="•"/>
+            </a:pPr>
+            <a:r>
+              <a:rPr lang="en-US" sz="4000" dirty="0">
+                <a:solidFill>
+                  <a:srgbClr val="111111"/>
+                </a:solidFill>
+                <a:latin typeface="Times New Roman" pitchFamily="34" charset="0"/>
+                <a:ea typeface="Times New Roman" pitchFamily="34" charset="-122"/>
+                <a:cs typeface="Times New Roman" pitchFamily="34" charset="-120"/>
+              </a:rPr>
+              <a:t>The heat escapes because there are no clouds.</a:t>
+            </a:r>
+            <a:endParaRPr lang="en-US" sz="4000" dirty="0"/>
+          </a:p>
+          <a:p>
+            <a:pPr algn="l" marL="342900" indent="-342900">
+              <a:spcAft>
+                <a:spcPts val="800"/>
+              </a:spcAft>
+              <a:buSzPct val="100000"/>
+              <a:buChar char="•"/>
             </a:pPr>
             <a:r>
               <a:rPr lang="en-US" sz="4000" b="1" dirty="0">
@@ -14983,11 +14948,12 @@
               </a:rPr>
               <a:t>Large daily range: </a:t>
             </a:r>
-            <a:pPr algn="l" indent="0" marL="0">
+            <a:pPr algn="l" marL="342900" indent="-342900">
               <a:spcAft>
                 <a:spcPts val="800"/>
               </a:spcAft>
-              <a:buNone/>
+              <a:buSzPct val="100000"/>
+              <a:buChar char="•"/>
             </a:pPr>
             <a:r>
               <a:rPr lang="en-US" sz="4000" dirty="0">
@@ -14998,7 +14964,7 @@
                 <a:ea typeface="Times New Roman" pitchFamily="34" charset="-122"/>
                 <a:cs typeface="Times New Roman" pitchFamily="34" charset="-120"/>
               </a:rPr>
-              <a:t>The difference between day and night can be 15 °C or more.</a:t>
+              <a:t>Often 15 to 20 °C.</a:t>
             </a:r>
             <a:endParaRPr lang="en-US" sz="4000" dirty="0"/>
           </a:p>
@@ -15355,48 +15321,9 @@
           </a:p>
         </p:txBody>
       </p:sp>
-      <p:sp>
-        <p:nvSpPr>
-          <p:cNvPr id="3" name="Text 1"/>
-          <p:cNvSpPr/>
-          <p:nvPr/>
-        </p:nvSpPr>
-        <p:spPr>
-          <a:xfrm>
-            <a:off x="457200" y="1005840"/>
-            <a:ext cx="11277295" cy="731520"/>
-          </a:xfrm>
-          <a:prstGeom prst="rect">
-            <a:avLst/>
-          </a:prstGeom>
-          <a:noFill/>
-          <a:ln/>
-        </p:spPr>
-        <p:txBody>
-          <a:bodyPr wrap="square" lIns="0" tIns="0" rIns="0" bIns="0" rtlCol="0" anchor="ctr"/>
-          <a:lstStyle/>
-          <a:p>
-            <a:pPr algn="ctr" indent="0" marL="0">
-              <a:buNone/>
-            </a:pPr>
-            <a:r>
-              <a:rPr lang="en-US" sz="3600" b="1" dirty="0">
-                <a:solidFill>
-                  <a:srgbClr val="990011"/>
-                </a:solidFill>
-                <a:latin typeface="Times New Roman" pitchFamily="34" charset="0"/>
-                <a:ea typeface="Times New Roman" pitchFamily="34" charset="-122"/>
-                <a:cs typeface="Times New Roman" pitchFamily="34" charset="-120"/>
-              </a:rPr>
-              <a:t>2. Temperatures</a:t>
-            </a:r>
-            <a:endParaRPr lang="en-US" sz="3600" dirty="0"/>
-          </a:p>
-        </p:txBody>
-      </p:sp>
       <p:pic>
         <p:nvPicPr>
-          <p:cNvPr id="4" name="Image 0" descr="/home/claude/f4/img/v2/aswan_temp_big.png">    </p:cNvPr>
+          <p:cNvPr id="3" name="Image 0" descr="/home/claude/f4/img/minesec_sheet.png">    </p:cNvPr>
           <p:cNvPicPr>
             <a:picLocks noChangeAspect="1"/>
           </p:cNvPicPr>
@@ -15410,8 +15337,8 @@
         </p:blipFill>
         <p:spPr>
           <a:xfrm>
-            <a:off x="1215564" y="1783080"/>
-            <a:ext cx="9760567" cy="4270248"/>
+            <a:off x="0" y="658368"/>
+            <a:ext cx="5120640" cy="5833872"/>
           </a:xfrm>
           <a:prstGeom prst="rect">
             <a:avLst/>
@@ -15420,14 +15347,14 @@
       </p:pic>
       <p:sp>
         <p:nvSpPr>
-          <p:cNvPr id="5" name="Text 2"/>
+          <p:cNvPr id="4" name="Text 1"/>
           <p:cNvSpPr/>
           <p:nvPr/>
         </p:nvSpPr>
         <p:spPr>
           <a:xfrm>
-            <a:off x="457200" y="6089904"/>
-            <a:ext cx="11277295" cy="347472"/>
+            <a:off x="5349240" y="1005840"/>
+            <a:ext cx="6522415" cy="731520"/>
           </a:xfrm>
           <a:prstGeom prst="rect">
             <a:avLst/>
@@ -15436,24 +15363,146 @@
           <a:ln/>
         </p:spPr>
         <p:txBody>
-          <a:bodyPr wrap="square" lIns="0" tIns="0" rIns="0" bIns="0" rtlCol="0" anchor="ctr"/>
+          <a:bodyPr wrap="square" lIns="0" tIns="0" rIns="0" bIns="0" rtlCol="0" anchor="ctr">
+            <a:normAutofit/>
+          </a:bodyPr>
           <a:lstStyle/>
           <a:p>
             <a:pPr algn="ctr" indent="0" marL="0">
               <a:buNone/>
             </a:pPr>
             <a:r>
-              <a:rPr lang="en-US" sz="1800" i="1" dirty="0">
-                <a:solidFill>
-                  <a:srgbClr val="555555"/>
+              <a:rPr lang="en-US" sz="3600" b="1" dirty="0">
+                <a:solidFill>
+                  <a:srgbClr val="990011"/>
                 </a:solidFill>
                 <a:latin typeface="Times New Roman" pitchFamily="34" charset="0"/>
                 <a:ea typeface="Times New Roman" pitchFamily="34" charset="-122"/>
                 <a:cs typeface="Times New Roman" pitchFamily="34" charset="-120"/>
               </a:rPr>
-              <a:t>Illustration: temperatures at Aswan</a:t>
-            </a:r>
-            <a:endParaRPr lang="en-US" sz="1800" dirty="0"/>
+              <a:t>3. Winds and Humidity</a:t>
+            </a:r>
+            <a:endParaRPr lang="en-US" sz="3600" dirty="0"/>
+          </a:p>
+        </p:txBody>
+      </p:sp>
+      <p:sp>
+        <p:nvSpPr>
+          <p:cNvPr id="5" name="Text 2"/>
+          <p:cNvSpPr/>
+          <p:nvPr/>
+        </p:nvSpPr>
+        <p:spPr>
+          <a:xfrm>
+            <a:off x="5349240" y="1783080"/>
+            <a:ext cx="6522415" cy="4663440"/>
+          </a:xfrm>
+          <a:prstGeom prst="rect">
+            <a:avLst/>
+          </a:prstGeom>
+          <a:noFill/>
+          <a:ln/>
+        </p:spPr>
+        <p:txBody>
+          <a:bodyPr wrap="square" lIns="0" tIns="0" rIns="0" bIns="0" rtlCol="0" anchor="t"/>
+          <a:lstStyle/>
+          <a:p>
+            <a:pPr algn="l" indent="0" marL="0">
+              <a:spcAft>
+                <a:spcPts val="800"/>
+              </a:spcAft>
+              <a:buNone/>
+            </a:pPr>
+            <a:r>
+              <a:rPr lang="en-US" sz="4000" i="1" dirty="0">
+                <a:solidFill>
+                  <a:srgbClr val="111111"/>
+                </a:solidFill>
+                <a:latin typeface="Times New Roman" pitchFamily="34" charset="0"/>
+                <a:ea typeface="Times New Roman" pitchFamily="34" charset="-122"/>
+                <a:cs typeface="Times New Roman" pitchFamily="34" charset="-120"/>
+              </a:rPr>
+              <a:t>The air of the desert has the following characteristics:</a:t>
+            </a:r>
+            <a:endParaRPr lang="en-US" sz="4000" dirty="0"/>
+          </a:p>
+          <a:p>
+            <a:pPr algn="l" marL="342900" indent="-342900">
+              <a:spcAft>
+                <a:spcPts val="800"/>
+              </a:spcAft>
+              <a:buSzPct val="100000"/>
+              <a:buChar char="•"/>
+            </a:pPr>
+            <a:r>
+              <a:rPr lang="en-US" sz="4000" b="1" dirty="0">
+                <a:solidFill>
+                  <a:srgbClr val="111111"/>
+                </a:solidFill>
+                <a:latin typeface="Times New Roman" pitchFamily="34" charset="0"/>
+                <a:ea typeface="Times New Roman" pitchFamily="34" charset="-122"/>
+                <a:cs typeface="Times New Roman" pitchFamily="34" charset="-120"/>
+              </a:rPr>
+              <a:t>Dry air: </a:t>
+            </a:r>
+            <a:pPr algn="l" marL="342900" indent="-342900">
+              <a:spcAft>
+                <a:spcPts val="800"/>
+              </a:spcAft>
+              <a:buSzPct val="100000"/>
+              <a:buChar char="•"/>
+            </a:pPr>
+            <a:r>
+              <a:rPr lang="en-US" sz="4000" dirty="0">
+                <a:solidFill>
+                  <a:srgbClr val="111111"/>
+                </a:solidFill>
+                <a:latin typeface="Times New Roman" pitchFamily="34" charset="0"/>
+                <a:ea typeface="Times New Roman" pitchFamily="34" charset="-122"/>
+                <a:cs typeface="Times New Roman" pitchFamily="34" charset="-120"/>
+              </a:rPr>
+              <a:t>The humidity is very low.</a:t>
+            </a:r>
+            <a:endParaRPr lang="en-US" sz="4000" dirty="0"/>
+          </a:p>
+          <a:p>
+            <a:pPr algn="l" marL="342900" indent="-342900">
+              <a:spcAft>
+                <a:spcPts val="800"/>
+              </a:spcAft>
+              <a:buSzPct val="100000"/>
+              <a:buChar char="•"/>
+            </a:pPr>
+            <a:r>
+              <a:rPr lang="en-US" sz="4000" b="1" dirty="0">
+                <a:solidFill>
+                  <a:srgbClr val="111111"/>
+                </a:solidFill>
+                <a:latin typeface="Times New Roman" pitchFamily="34" charset="0"/>
+                <a:ea typeface="Times New Roman" pitchFamily="34" charset="-122"/>
+                <a:cs typeface="Times New Roman" pitchFamily="34" charset="-120"/>
+              </a:rPr>
+              <a:t>Hot, dry winds: </a:t>
+            </a:r>
+            <a:pPr algn="l" marL="342900" indent="-342900">
+              <a:spcAft>
+                <a:spcPts val="800"/>
+              </a:spcAft>
+              <a:buSzPct val="100000"/>
+              <a:buChar char="•"/>
+            </a:pPr>
+            <a:r>
+              <a:rPr lang="en-US" sz="4000" dirty="0">
+                <a:solidFill>
+                  <a:srgbClr val="111111"/>
+                </a:solidFill>
+                <a:latin typeface="Times New Roman" pitchFamily="34" charset="0"/>
+                <a:ea typeface="Times New Roman" pitchFamily="34" charset="-122"/>
+                <a:cs typeface="Times New Roman" pitchFamily="34" charset="-120"/>
+              </a:rPr>
+              <a:t>Winds such as the Harmattan.</a:t>
+            </a:r>
+            <a:endParaRPr lang="en-US" sz="4000" dirty="0"/>
           </a:p>
         </p:txBody>
       </p:sp>
@@ -15569,9 +15618,111 @@
           </a:p>
         </p:txBody>
       </p:sp>
+      <p:sp>
+        <p:nvSpPr>
+          <p:cNvPr id="3" name="Text 1"/>
+          <p:cNvSpPr/>
+          <p:nvPr/>
+        </p:nvSpPr>
+        <p:spPr>
+          <a:xfrm>
+            <a:off x="365760" y="1005840"/>
+            <a:ext cx="11460175" cy="731520"/>
+          </a:xfrm>
+          <a:prstGeom prst="rect">
+            <a:avLst/>
+          </a:prstGeom>
+          <a:noFill/>
+          <a:ln/>
+        </p:spPr>
+        <p:txBody>
+          <a:bodyPr wrap="square" lIns="0" tIns="0" rIns="0" bIns="0" rtlCol="0" anchor="ctr">
+            <a:normAutofit/>
+          </a:bodyPr>
+          <a:lstStyle/>
+          <a:p>
+            <a:pPr algn="ctr" indent="0" marL="0">
+              <a:buNone/>
+            </a:pPr>
+            <a:r>
+              <a:rPr lang="en-US" sz="3600" b="1" dirty="0">
+                <a:solidFill>
+                  <a:srgbClr val="990011"/>
+                </a:solidFill>
+                <a:latin typeface="Times New Roman" pitchFamily="34" charset="0"/>
+                <a:ea typeface="Times New Roman" pitchFamily="34" charset="-122"/>
+                <a:cs typeface="Times New Roman" pitchFamily="34" charset="-120"/>
+              </a:rPr>
+              <a:t>3. Winds and Humidity</a:t>
+            </a:r>
+            <a:endParaRPr lang="en-US" sz="3600" dirty="0"/>
+          </a:p>
+        </p:txBody>
+      </p:sp>
+      <p:sp>
+        <p:nvSpPr>
+          <p:cNvPr id="4" name="Text 2"/>
+          <p:cNvSpPr/>
+          <p:nvPr/>
+        </p:nvSpPr>
+        <p:spPr>
+          <a:xfrm>
+            <a:off x="365760" y="1783080"/>
+            <a:ext cx="4846320" cy="4617720"/>
+          </a:xfrm>
+          <a:prstGeom prst="rect">
+            <a:avLst/>
+          </a:prstGeom>
+          <a:noFill/>
+          <a:ln/>
+        </p:spPr>
+        <p:txBody>
+          <a:bodyPr wrap="square" lIns="0" tIns="0" rIns="0" bIns="0" rtlCol="0" anchor="t"/>
+          <a:lstStyle/>
+          <a:p>
+            <a:pPr algn="l" marL="342900" indent="-342900">
+              <a:spcAft>
+                <a:spcPts val="800"/>
+              </a:spcAft>
+              <a:buSzPct val="100000"/>
+              <a:buChar char="•"/>
+            </a:pPr>
+            <a:r>
+              <a:rPr lang="en-US" sz="3600" b="1" dirty="0">
+                <a:solidFill>
+                  <a:srgbClr val="111111"/>
+                </a:solidFill>
+                <a:latin typeface="Times New Roman" pitchFamily="34" charset="0"/>
+                <a:ea typeface="Times New Roman" pitchFamily="34" charset="-122"/>
+                <a:cs typeface="Times New Roman" pitchFamily="34" charset="-120"/>
+              </a:rPr>
+              <a:t>Sandstorms: </a:t>
+            </a:r>
+            <a:pPr algn="l" marL="342900" indent="-342900">
+              <a:spcAft>
+                <a:spcPts val="800"/>
+              </a:spcAft>
+              <a:buSzPct val="100000"/>
+              <a:buChar char="•"/>
+            </a:pPr>
+            <a:r>
+              <a:rPr lang="en-US" sz="3600" dirty="0">
+                <a:solidFill>
+                  <a:srgbClr val="111111"/>
+                </a:solidFill>
+                <a:latin typeface="Times New Roman" pitchFamily="34" charset="0"/>
+                <a:ea typeface="Times New Roman" pitchFamily="34" charset="-122"/>
+                <a:cs typeface="Times New Roman" pitchFamily="34" charset="-120"/>
+              </a:rPr>
+              <a:t>Strong winds lift sand and dust.</a:t>
+            </a:r>
+            <a:endParaRPr lang="en-US" sz="3600" dirty="0"/>
+          </a:p>
+        </p:txBody>
+      </p:sp>
       <p:pic>
         <p:nvPicPr>
-          <p:cNvPr id="3" name="Image 0" descr="/home/claude/f4/img/minesec_sheet.png">    </p:cNvPr>
+          <p:cNvPr id="5" name="Image 0" descr="/home/claude/f4/img/v2/f2t_sandstorm.jpg">    </p:cNvPr>
           <p:cNvPicPr>
             <a:picLocks noChangeAspect="1"/>
           </p:cNvPicPr>
@@ -15585,8 +15736,8 @@
         </p:blipFill>
         <p:spPr>
           <a:xfrm>
-            <a:off x="0" y="658368"/>
-            <a:ext cx="3840480" cy="5833872"/>
+            <a:off x="5349240" y="2450233"/>
+            <a:ext cx="6659575" cy="2935942"/>
           </a:xfrm>
           <a:prstGeom prst="rect">
             <a:avLst/>
@@ -15595,14 +15746,14 @@
       </p:pic>
       <p:sp>
         <p:nvSpPr>
-          <p:cNvPr id="4" name="Text 1"/>
+          <p:cNvPr id="6" name="Text 3"/>
           <p:cNvSpPr/>
           <p:nvPr/>
         </p:nvSpPr>
         <p:spPr>
           <a:xfrm>
-            <a:off x="4069080" y="1005840"/>
-            <a:ext cx="7802575" cy="731520"/>
+            <a:off x="5349240" y="6089904"/>
+            <a:ext cx="6659575" cy="347472"/>
           </a:xfrm>
           <a:prstGeom prst="rect">
             <a:avLst/>
@@ -15611,142 +15762,24 @@
           <a:ln/>
         </p:spPr>
         <p:txBody>
-          <a:bodyPr wrap="square" lIns="0" tIns="0" rIns="0" bIns="0" rtlCol="0" anchor="ctr">
-            <a:normAutofit/>
-          </a:bodyPr>
+          <a:bodyPr wrap="square" lIns="0" tIns="0" rIns="0" bIns="0" rtlCol="0" anchor="ctr"/>
           <a:lstStyle/>
           <a:p>
             <a:pPr algn="ctr" indent="0" marL="0">
               <a:buNone/>
             </a:pPr>
             <a:r>
-              <a:rPr lang="en-US" sz="3600" b="1" dirty="0">
-                <a:solidFill>
-                  <a:srgbClr val="990011"/>
+              <a:rPr lang="en-US" sz="1600" i="1" dirty="0">
+                <a:solidFill>
+                  <a:srgbClr val="555555"/>
                 </a:solidFill>
                 <a:latin typeface="Times New Roman" pitchFamily="34" charset="0"/>
                 <a:ea typeface="Times New Roman" pitchFamily="34" charset="-122"/>
                 <a:cs typeface="Times New Roman" pitchFamily="34" charset="-120"/>
               </a:rPr>
-              <a:t>3. Winds</a:t>
-            </a:r>
-            <a:endParaRPr lang="en-US" sz="3600" dirty="0"/>
-          </a:p>
-        </p:txBody>
-      </p:sp>
-      <p:sp>
-        <p:nvSpPr>
-          <p:cNvPr id="5" name="Text 2"/>
-          <p:cNvSpPr/>
-          <p:nvPr/>
-        </p:nvSpPr>
-        <p:spPr>
-          <a:xfrm>
-            <a:off x="4069080" y="1783080"/>
-            <a:ext cx="7802575" cy="4663440"/>
-          </a:xfrm>
-          <a:prstGeom prst="rect">
-            <a:avLst/>
-          </a:prstGeom>
-          <a:noFill/>
-          <a:ln/>
-        </p:spPr>
-        <p:txBody>
-          <a:bodyPr wrap="square" lIns="0" tIns="0" rIns="0" bIns="0" rtlCol="0" anchor="t"/>
-          <a:lstStyle/>
-          <a:p>
-            <a:pPr algn="l" indent="0" marL="0">
-              <a:spcAft>
-                <a:spcPts val="800"/>
-              </a:spcAft>
-              <a:buNone/>
-            </a:pPr>
-            <a:r>
-              <a:rPr lang="en-US" sz="4000" i="1" dirty="0">
-                <a:solidFill>
-                  <a:srgbClr val="111111"/>
-                </a:solidFill>
-                <a:latin typeface="Times New Roman" pitchFamily="34" charset="0"/>
-                <a:ea typeface="Times New Roman" pitchFamily="34" charset="-122"/>
-                <a:cs typeface="Times New Roman" pitchFamily="34" charset="-120"/>
-              </a:rPr>
-              <a:t>Winds in hot deserts have the following characteristics:</a:t>
-            </a:r>
-            <a:endParaRPr lang="en-US" sz="4000" dirty="0"/>
-          </a:p>
-          <a:p>
-            <a:pPr algn="l" indent="0" marL="0">
-              <a:spcAft>
-                <a:spcPts val="800"/>
-              </a:spcAft>
-              <a:buNone/>
-            </a:pPr>
-            <a:r>
-              <a:rPr lang="en-US" sz="4000" b="1" dirty="0">
-                <a:solidFill>
-                  <a:srgbClr val="111111"/>
-                </a:solidFill>
-                <a:latin typeface="Times New Roman" pitchFamily="34" charset="0"/>
-                <a:ea typeface="Times New Roman" pitchFamily="34" charset="-122"/>
-                <a:cs typeface="Times New Roman" pitchFamily="34" charset="-120"/>
-              </a:rPr>
-              <a:t>Hot, dry winds: </a:t>
-            </a:r>
-            <a:pPr algn="l" indent="0" marL="0">
-              <a:spcAft>
-                <a:spcPts val="800"/>
-              </a:spcAft>
-              <a:buNone/>
-            </a:pPr>
-            <a:r>
-              <a:rPr lang="en-US" sz="4000" dirty="0">
-                <a:solidFill>
-                  <a:srgbClr val="111111"/>
-                </a:solidFill>
-                <a:latin typeface="Times New Roman" pitchFamily="34" charset="0"/>
-                <a:ea typeface="Times New Roman" pitchFamily="34" charset="-122"/>
-                <a:cs typeface="Times New Roman" pitchFamily="34" charset="-120"/>
-              </a:rPr>
-              <a:t>Hot and dry winds such as the Harmattan and the Sirocco blow from the desert.</a:t>
-            </a:r>
-            <a:endParaRPr lang="en-US" sz="4000" dirty="0"/>
-          </a:p>
-          <a:p>
-            <a:pPr algn="l" indent="0" marL="0">
-              <a:spcAft>
-                <a:spcPts val="800"/>
-              </a:spcAft>
-              <a:buNone/>
-            </a:pPr>
-            <a:r>
-              <a:rPr lang="en-US" sz="4000" b="1" dirty="0">
-                <a:solidFill>
-                  <a:srgbClr val="111111"/>
-                </a:solidFill>
-                <a:latin typeface="Times New Roman" pitchFamily="34" charset="0"/>
-                <a:ea typeface="Times New Roman" pitchFamily="34" charset="-122"/>
-                <a:cs typeface="Times New Roman" pitchFamily="34" charset="-120"/>
-              </a:rPr>
-              <a:t>Sandstorms: </a:t>
-            </a:r>
-            <a:pPr algn="l" indent="0" marL="0">
-              <a:spcAft>
-                <a:spcPts val="800"/>
-              </a:spcAft>
-              <a:buNone/>
-            </a:pPr>
-            <a:r>
-              <a:rPr lang="en-US" sz="4000" dirty="0">
-                <a:solidFill>
-                  <a:srgbClr val="111111"/>
-                </a:solidFill>
-                <a:latin typeface="Times New Roman" pitchFamily="34" charset="0"/>
-                <a:ea typeface="Times New Roman" pitchFamily="34" charset="-122"/>
-                <a:cs typeface="Times New Roman" pitchFamily="34" charset="-120"/>
-              </a:rPr>
-              <a:t>Sandstorms damage crops, roads and machines.</a:t>
-            </a:r>
-            <a:endParaRPr lang="en-US" sz="4000" dirty="0"/>
+              <a:t>Illustration: a sandstorm</a:t>
+            </a:r>
+            <a:endParaRPr lang="en-US" sz="1600" dirty="0"/>
           </a:p>
         </p:txBody>
       </p:sp>
@@ -20206,7 +20239,7 @@
                           <a:ea typeface="Calibri" pitchFamily="34" charset="-122"/>
                           <a:cs typeface="Calibri" pitchFamily="34" charset="-120"/>
                         </a:rPr>
-                        <a:t>DEFINITIONS; Rainfall; Temperatures; Winds.</a:t>
+                        <a:t>DEFINITIONS; Rainfall; Temperature; Winds and Humidity.</a:t>
                       </a:r>
                       <a:endParaRPr lang="en-US" sz="1600" dirty="0">
                         <a:latin typeface="Calibri" charset="0"/>
@@ -20943,7 +20976,7 @@
         <p:spPr>
           <a:xfrm>
             <a:off x="0" y="658368"/>
-            <a:ext cx="1463040" cy="5833872"/>
+            <a:ext cx="2468880" cy="5833872"/>
           </a:xfrm>
           <a:prstGeom prst="rect">
             <a:avLst/>
@@ -20958,8 +20991,8 @@
         </p:nvSpPr>
         <p:spPr>
           <a:xfrm>
-            <a:off x="1691640" y="1005840"/>
-            <a:ext cx="10180015" cy="731520"/>
+            <a:off x="2697480" y="1005840"/>
+            <a:ext cx="9174175" cy="731520"/>
           </a:xfrm>
           <a:prstGeom prst="rect">
             <a:avLst/>
@@ -20999,8 +21032,8 @@
         </p:nvSpPr>
         <p:spPr>
           <a:xfrm>
-            <a:off x="1691640" y="1783080"/>
-            <a:ext cx="10180015" cy="4663440"/>
+            <a:off x="2697480" y="1783080"/>
+            <a:ext cx="9174175" cy="4663440"/>
           </a:xfrm>
           <a:prstGeom prst="rect">
             <a:avLst/>
@@ -21091,7 +21124,7 @@
                 <a:ea typeface="Calibri" pitchFamily="34" charset="-122"/>
                 <a:cs typeface="Calibri" pitchFamily="34" charset="-120"/>
               </a:rPr>
-              <a:t>Without the projector (Activity 1): write the three numbers on the board.</a:t>
+              <a:t>Without the projector (Activity 1): write the numbers on the board.</a:t>
             </a:r>
             <a:endParaRPr lang="en-US" sz="2000" dirty="0"/>
           </a:p>
@@ -21112,7 +21145,7 @@
                 <a:ea typeface="Calibri" pitchFamily="34" charset="-122"/>
                 <a:cs typeface="Calibri" pitchFamily="34" charset="-120"/>
               </a:rPr>
-              <a:t>Without the projector (Activity 2): describe a desert valley that is dry for years and suddenly full of water.</a:t>
+              <a:t>Without the projector (Activity 2): describe a sudden storm.</a:t>
             </a:r>
             <a:endParaRPr lang="en-US" sz="2000" dirty="0"/>
           </a:p>
@@ -21133,7 +21166,7 @@
                 <a:ea typeface="Calibri" pitchFamily="34" charset="-122"/>
                 <a:cs typeface="Calibri" pitchFamily="34" charset="-120"/>
               </a:rPr>
-              <a:t>Without the projector (Activity 3): write 42 °C and 26 °C on the board and subtract.</a:t>
+              <a:t>Without the projector (Activity 3): write the temperatures on the board.</a:t>
             </a:r>
             <a:endParaRPr lang="en-US" sz="2000" dirty="0"/>
           </a:p>
@@ -21154,7 +21187,28 @@
                 <a:ea typeface="Calibri" pitchFamily="34" charset="-122"/>
                 <a:cs typeface="Calibri" pitchFamily="34" charset="-120"/>
               </a:rPr>
-              <a:t>Without the projector (Activity 4): compare a cloudy night and a clear night in December in Garoua.</a:t>
+              <a:t>Without the projector (Activity 4): compare a clear night and a cloudy night.</a:t>
+            </a:r>
+            <a:endParaRPr lang="en-US" sz="2000" dirty="0"/>
+          </a:p>
+          <a:p>
+            <a:pPr algn="l" marL="342900" indent="-342900">
+              <a:spcAft>
+                <a:spcPts val="800"/>
+              </a:spcAft>
+              <a:buSzPct val="100000"/>
+              <a:buChar char="•"/>
+            </a:pPr>
+            <a:r>
+              <a:rPr lang="en-US" sz="2000" dirty="0">
+                <a:solidFill>
+                  <a:srgbClr val="111111"/>
+                </a:solidFill>
+                <a:latin typeface="Calibri" pitchFamily="34" charset="0"/>
+                <a:ea typeface="Calibri" pitchFamily="34" charset="-122"/>
+                <a:cs typeface="Calibri" pitchFamily="34" charset="-120"/>
+              </a:rPr>
+              <a:t>Without the projector (Activity 5): describe a dusty day.</a:t>
             </a:r>
             <a:endParaRPr lang="en-US" sz="2000" dirty="0"/>
           </a:p>
@@ -21266,7 +21320,7 @@
                 <a:ea typeface="Calibri" pitchFamily="34" charset="-122"/>
                 <a:cs typeface="Calibri" pitchFamily="34" charset="-120"/>
               </a:rPr>
-              <a:t>TEACHER'S NOTE</a:t>
+              <a:t>REFERENCES</a:t>
             </a:r>
             <a:endParaRPr lang="en-US" sz="1400" dirty="0"/>
           </a:p>
@@ -21331,7 +21385,7 @@
                 <a:ea typeface="Times New Roman" pitchFamily="34" charset="-122"/>
                 <a:cs typeface="Times New Roman" pitchFamily="34" charset="-120"/>
               </a:rPr>
-              <a:t>Teacher's Note (continued)</a:t>
+              <a:t>References</a:t>
             </a:r>
             <a:endParaRPr lang="en-US" sz="3600" dirty="0"/>
           </a:p>
@@ -21366,7 +21420,7 @@
               <a:buChar char="•"/>
             </a:pPr>
             <a:r>
-              <a:rPr lang="en-US" sz="2000" dirty="0">
+              <a:rPr lang="en-US" sz="1800" dirty="0">
                 <a:solidFill>
                   <a:srgbClr val="111111"/>
                 </a:solidFill>
@@ -21374,9 +21428,114 @@
                 <a:ea typeface="Calibri" pitchFamily="34" charset="-122"/>
                 <a:cs typeface="Calibri" pitchFamily="34" charset="-120"/>
               </a:rPr>
-              <a:t>Without the projector (Activity 5): compare with a very dusty Harmattan day.</a:t>
-            </a:r>
-            <a:endParaRPr lang="en-US" sz="2000" dirty="0"/>
+              <a:t>Harmonised Progression Sheet, Economic Geography (5051), Form 2.</a:t>
+            </a:r>
+            <a:endParaRPr lang="en-US" sz="1800" dirty="0"/>
+          </a:p>
+          <a:p>
+            <a:pPr algn="l" marL="342900" indent="-342900">
+              <a:spcAft>
+                <a:spcPts val="800"/>
+              </a:spcAft>
+              <a:buSzPct val="100000"/>
+              <a:buChar char="•"/>
+            </a:pPr>
+            <a:r>
+              <a:rPr lang="en-US" sz="1800" dirty="0">
+                <a:solidFill>
+                  <a:srgbClr val="111111"/>
+                </a:solidFill>
+                <a:latin typeface="Calibri" pitchFamily="34" charset="0"/>
+                <a:ea typeface="Calibri" pitchFamily="34" charset="-122"/>
+                <a:cs typeface="Calibri" pitchFamily="34" charset="-120"/>
+              </a:rPr>
+              <a:t>Class textbook: The major biomes of the world (hot deserts).</a:t>
+            </a:r>
+            <a:endParaRPr lang="en-US" sz="1800" dirty="0"/>
+          </a:p>
+          <a:p>
+            <a:pPr algn="l" marL="342900" indent="-342900">
+              <a:spcAft>
+                <a:spcPts val="800"/>
+              </a:spcAft>
+              <a:buSzPct val="100000"/>
+              <a:buChar char="•"/>
+            </a:pPr>
+            <a:r>
+              <a:rPr lang="en-US" sz="1800" dirty="0">
+                <a:solidFill>
+                  <a:srgbClr val="111111"/>
+                </a:solidFill>
+                <a:latin typeface="Calibri" pitchFamily="34" charset="0"/>
+                <a:ea typeface="Calibri" pitchFamily="34" charset="-122"/>
+                <a:cs typeface="Calibri" pitchFamily="34" charset="-120"/>
+              </a:rPr>
+              <a:t>Aswan climate normals: NOAA 1991–2020 (via Wikipedia, "Aswan").</a:t>
+            </a:r>
+            <a:endParaRPr lang="en-US" sz="1800" dirty="0"/>
+          </a:p>
+          <a:p>
+            <a:pPr algn="l" marL="342900" indent="-342900">
+              <a:spcAft>
+                <a:spcPts val="800"/>
+              </a:spcAft>
+              <a:buSzPct val="100000"/>
+              <a:buChar char="•"/>
+            </a:pPr>
+            <a:r>
+              <a:rPr lang="en-US" sz="1800" dirty="0">
+                <a:solidFill>
+                  <a:srgbClr val="111111"/>
+                </a:solidFill>
+                <a:latin typeface="Calibri" pitchFamily="34" charset="0"/>
+                <a:ea typeface="Calibri" pitchFamily="34" charset="-122"/>
+                <a:cs typeface="Calibri" pitchFamily="34" charset="-120"/>
+              </a:rPr>
+              <a:t>Photo, Activity 2: “Flooding on the road to Delicate Arch Overlook” by ArchesNPS, Public domain 1.0, via Flickr (https://www.flickr.com/photos/72578886@N08/8083724580)</a:t>
+            </a:r>
+            <a:endParaRPr lang="en-US" sz="1800" dirty="0"/>
+          </a:p>
+          <a:p>
+            <a:pPr algn="l" marL="342900" indent="-342900">
+              <a:spcAft>
+                <a:spcPts val="800"/>
+              </a:spcAft>
+              <a:buSzPct val="100000"/>
+              <a:buChar char="•"/>
+            </a:pPr>
+            <a:r>
+              <a:rPr lang="en-US" sz="1800" dirty="0">
+                <a:solidFill>
+                  <a:srgbClr val="111111"/>
+                </a:solidFill>
+                <a:latin typeface="Calibri" pitchFamily="34" charset="0"/>
+                <a:ea typeface="Calibri" pitchFamily="34" charset="-122"/>
+                <a:cs typeface="Calibri" pitchFamily="34" charset="-120"/>
+              </a:rPr>
+              <a:t>Photo, Activity 5: “Sandstorm at Camp Bastion, Afghanistan” by Defence Images, CC BY-NC 2.0, via Flickr (https://www.flickr.com/photos/48399297@N04/10343833885)</a:t>
+            </a:r>
+            <a:endParaRPr lang="en-US" sz="1800" dirty="0"/>
+          </a:p>
+          <a:p>
+            <a:pPr algn="l" marL="342900" indent="-342900">
+              <a:spcAft>
+                <a:spcPts val="800"/>
+              </a:spcAft>
+              <a:buSzPct val="100000"/>
+              <a:buChar char="•"/>
+            </a:pPr>
+            <a:r>
+              <a:rPr lang="en-US" sz="1800" dirty="0">
+                <a:solidFill>
+                  <a:srgbClr val="111111"/>
+                </a:solidFill>
+                <a:latin typeface="Calibri" pitchFamily="34" charset="0"/>
+                <a:ea typeface="Calibri" pitchFamily="34" charset="-122"/>
+                <a:cs typeface="Calibri" pitchFamily="34" charset="-120"/>
+              </a:rPr>
+              <a:t>Diagrams and animations: drawn for this lesson (Geography Department).</a:t>
+            </a:r>
+            <a:endParaRPr lang="en-US" sz="1800" dirty="0"/>
           </a:p>
         </p:txBody>
       </p:sp>
@@ -21423,331 +21582,6 @@
             <a:fld id="{F7021451-1387-4CA6-816F-3879F97B5CBC}" type="slidenum">
               <a:rPr b="1" lang="en-US"/>
               <a:t>54</a:t>
-            </a:fld>
-            <a:endParaRPr lang="en-US"/>
-          </a:p>
-        </p:txBody>
-      </p:sp>
-    </p:spTree>
-  </p:cSld>
-  <p:clrMapOvr>
-    <a:masterClrMapping/>
-  </p:clrMapOvr>
-</p:sld>
-</file>
-
-<file path=ppt/slides/slide55.xml><?xml version="1.0" encoding="utf-8"?>
-<p:sld xmlns:a="http://schemas.openxmlformats.org/drawingml/2006/main" xmlns:r="http://schemas.openxmlformats.org/officeDocument/2006/relationships" xmlns:p="http://schemas.openxmlformats.org/presentationml/2006/main">
-  <p:cSld name="Slide 55">
-    <p:spTree>
-      <p:nvGrpSpPr>
-        <p:cNvPr id="1" name=""/>
-        <p:cNvGrpSpPr/>
-        <p:nvPr/>
-      </p:nvGrpSpPr>
-      <p:grpSpPr>
-        <a:xfrm>
-          <a:off x="0" y="0"/>
-          <a:ext cx="0" cy="0"/>
-          <a:chOff x="0" y="0"/>
-          <a:chExt cx="0" cy="0"/>
-        </a:xfrm>
-      </p:grpSpPr>
-      <p:sp>
-        <p:nvSpPr>
-          <p:cNvPr id="2" name="Text 0"/>
-          <p:cNvSpPr/>
-          <p:nvPr/>
-        </p:nvSpPr>
-        <p:spPr>
-          <a:xfrm>
-            <a:off x="457200" y="713232"/>
-            <a:ext cx="11368735" cy="274320"/>
-          </a:xfrm>
-          <a:prstGeom prst="rect">
-            <a:avLst/>
-          </a:prstGeom>
-          <a:noFill/>
-          <a:ln/>
-        </p:spPr>
-        <p:txBody>
-          <a:bodyPr wrap="square" lIns="0" tIns="0" rIns="0" bIns="0" rtlCol="0" anchor="ctr"/>
-          <a:lstStyle/>
-          <a:p>
-            <a:pPr algn="r" indent="0" marL="0">
-              <a:buNone/>
-            </a:pPr>
-            <a:r>
-              <a:rPr lang="en-US" sz="1400" b="1" dirty="0">
-                <a:solidFill>
-                  <a:srgbClr val="1C3F6E"/>
-                </a:solidFill>
-                <a:latin typeface="Calibri" pitchFamily="34" charset="0"/>
-                <a:ea typeface="Calibri" pitchFamily="34" charset="-122"/>
-                <a:cs typeface="Calibri" pitchFamily="34" charset="-120"/>
-              </a:rPr>
-              <a:t>REFERENCES</a:t>
-            </a:r>
-            <a:endParaRPr lang="en-US" sz="1400" dirty="0"/>
-          </a:p>
-        </p:txBody>
-      </p:sp>
-      <p:pic>
-        <p:nvPicPr>
-          <p:cNvPr id="3" name="Image 0" descr="/home/claude/f4/img/minesec_sheet.png">    </p:cNvPr>
-          <p:cNvPicPr>
-            <a:picLocks noChangeAspect="1"/>
-          </p:cNvPicPr>
-          <p:nvPr/>
-        </p:nvPicPr>
-        <p:blipFill>
-          <a:blip r:embed="rId1"/>
-          <a:stretch>
-            <a:fillRect/>
-          </a:stretch>
-        </p:blipFill>
-        <p:spPr>
-          <a:xfrm>
-            <a:off x="0" y="658368"/>
-            <a:ext cx="5120640" cy="5833872"/>
-          </a:xfrm>
-          <a:prstGeom prst="rect">
-            <a:avLst/>
-          </a:prstGeom>
-        </p:spPr>
-      </p:pic>
-      <p:sp>
-        <p:nvSpPr>
-          <p:cNvPr id="4" name="Text 1"/>
-          <p:cNvSpPr/>
-          <p:nvPr/>
-        </p:nvSpPr>
-        <p:spPr>
-          <a:xfrm>
-            <a:off x="5349240" y="1005840"/>
-            <a:ext cx="6522415" cy="731520"/>
-          </a:xfrm>
-          <a:prstGeom prst="rect">
-            <a:avLst/>
-          </a:prstGeom>
-          <a:noFill/>
-          <a:ln/>
-        </p:spPr>
-        <p:txBody>
-          <a:bodyPr wrap="square" lIns="0" tIns="0" rIns="0" bIns="0" rtlCol="0" anchor="ctr">
-            <a:normAutofit/>
-          </a:bodyPr>
-          <a:lstStyle/>
-          <a:p>
-            <a:pPr algn="ctr" indent="0" marL="0">
-              <a:buNone/>
-            </a:pPr>
-            <a:r>
-              <a:rPr lang="en-US" sz="3600" b="1" dirty="0">
-                <a:solidFill>
-                  <a:srgbClr val="990011"/>
-                </a:solidFill>
-                <a:latin typeface="Times New Roman" pitchFamily="34" charset="0"/>
-                <a:ea typeface="Times New Roman" pitchFamily="34" charset="-122"/>
-                <a:cs typeface="Times New Roman" pitchFamily="34" charset="-120"/>
-              </a:rPr>
-              <a:t>References</a:t>
-            </a:r>
-            <a:endParaRPr lang="en-US" sz="3600" dirty="0"/>
-          </a:p>
-        </p:txBody>
-      </p:sp>
-      <p:sp>
-        <p:nvSpPr>
-          <p:cNvPr id="5" name="Text 2"/>
-          <p:cNvSpPr/>
-          <p:nvPr/>
-        </p:nvSpPr>
-        <p:spPr>
-          <a:xfrm>
-            <a:off x="5349240" y="1783080"/>
-            <a:ext cx="6522415" cy="4663440"/>
-          </a:xfrm>
-          <a:prstGeom prst="rect">
-            <a:avLst/>
-          </a:prstGeom>
-          <a:noFill/>
-          <a:ln/>
-        </p:spPr>
-        <p:txBody>
-          <a:bodyPr wrap="square" lIns="0" tIns="0" rIns="0" bIns="0" rtlCol="0" anchor="t"/>
-          <a:lstStyle/>
-          <a:p>
-            <a:pPr algn="l" marL="342900" indent="-342900">
-              <a:spcAft>
-                <a:spcPts val="800"/>
-              </a:spcAft>
-              <a:buSzPct val="100000"/>
-              <a:buChar char="•"/>
-            </a:pPr>
-            <a:r>
-              <a:rPr lang="en-US" sz="1800" dirty="0">
-                <a:solidFill>
-                  <a:srgbClr val="111111"/>
-                </a:solidFill>
-                <a:latin typeface="Calibri" pitchFamily="34" charset="0"/>
-                <a:ea typeface="Calibri" pitchFamily="34" charset="-122"/>
-                <a:cs typeface="Calibri" pitchFamily="34" charset="-120"/>
-              </a:rPr>
-              <a:t>Harmonised Progression Sheet, Economic Geography (5051), Form 2.</a:t>
-            </a:r>
-            <a:endParaRPr lang="en-US" sz="1800" dirty="0"/>
-          </a:p>
-          <a:p>
-            <a:pPr algn="l" marL="342900" indent="-342900">
-              <a:spcAft>
-                <a:spcPts val="800"/>
-              </a:spcAft>
-              <a:buSzPct val="100000"/>
-              <a:buChar char="•"/>
-            </a:pPr>
-            <a:r>
-              <a:rPr lang="en-US" sz="1800" dirty="0">
-                <a:solidFill>
-                  <a:srgbClr val="111111"/>
-                </a:solidFill>
-                <a:latin typeface="Calibri" pitchFamily="34" charset="0"/>
-                <a:ea typeface="Calibri" pitchFamily="34" charset="-122"/>
-                <a:cs typeface="Calibri" pitchFamily="34" charset="-120"/>
-              </a:rPr>
-              <a:t>Class textbook: The major biomes of the world (hot deserts).</a:t>
-            </a:r>
-            <a:endParaRPr lang="en-US" sz="1800" dirty="0"/>
-          </a:p>
-          <a:p>
-            <a:pPr algn="l" marL="342900" indent="-342900">
-              <a:spcAft>
-                <a:spcPts val="800"/>
-              </a:spcAft>
-              <a:buSzPct val="100000"/>
-              <a:buChar char="•"/>
-            </a:pPr>
-            <a:r>
-              <a:rPr lang="en-US" sz="1800" dirty="0">
-                <a:solidFill>
-                  <a:srgbClr val="111111"/>
-                </a:solidFill>
-                <a:latin typeface="Calibri" pitchFamily="34" charset="0"/>
-                <a:ea typeface="Calibri" pitchFamily="34" charset="-122"/>
-                <a:cs typeface="Calibri" pitchFamily="34" charset="-120"/>
-              </a:rPr>
-              <a:t>Aswan climate normals: NOAA 1991–2020 (via Wikipedia, "Aswan").</a:t>
-            </a:r>
-            <a:endParaRPr lang="en-US" sz="1800" dirty="0"/>
-          </a:p>
-          <a:p>
-            <a:pPr algn="l" marL="342900" indent="-342900">
-              <a:spcAft>
-                <a:spcPts val="800"/>
-              </a:spcAft>
-              <a:buSzPct val="100000"/>
-              <a:buChar char="•"/>
-            </a:pPr>
-            <a:r>
-              <a:rPr lang="en-US" sz="1800" dirty="0">
-                <a:solidFill>
-                  <a:srgbClr val="111111"/>
-                </a:solidFill>
-                <a:latin typeface="Calibri" pitchFamily="34" charset="0"/>
-                <a:ea typeface="Calibri" pitchFamily="34" charset="-122"/>
-                <a:cs typeface="Calibri" pitchFamily="34" charset="-120"/>
-              </a:rPr>
-              <a:t>Photo, Activity 2: “Flooding on the road to Delicate Arch Overlook” by ArchesNPS, Public domain 1.0, via Flickr (https://www.flickr.com/photos/72578886@N08/8083724580)</a:t>
-            </a:r>
-            <a:endParaRPr lang="en-US" sz="1800" dirty="0"/>
-          </a:p>
-          <a:p>
-            <a:pPr algn="l" marL="342900" indent="-342900">
-              <a:spcAft>
-                <a:spcPts val="800"/>
-              </a:spcAft>
-              <a:buSzPct val="100000"/>
-              <a:buChar char="•"/>
-            </a:pPr>
-            <a:r>
-              <a:rPr lang="en-US" sz="1800" dirty="0">
-                <a:solidFill>
-                  <a:srgbClr val="111111"/>
-                </a:solidFill>
-                <a:latin typeface="Calibri" pitchFamily="34" charset="0"/>
-                <a:ea typeface="Calibri" pitchFamily="34" charset="-122"/>
-                <a:cs typeface="Calibri" pitchFamily="34" charset="-120"/>
-              </a:rPr>
-              <a:t>Photo, Activity 5: “Sandstorm at Camp Bastion, Afghanistan” by Defence Images, CC BY-NC 2.0, via Flickr (https://www.flickr.com/photos/48399297@N04/10343833885)</a:t>
-            </a:r>
-            <a:endParaRPr lang="en-US" sz="1800" dirty="0"/>
-          </a:p>
-          <a:p>
-            <a:pPr algn="l" marL="342900" indent="-342900">
-              <a:spcAft>
-                <a:spcPts val="800"/>
-              </a:spcAft>
-              <a:buSzPct val="100000"/>
-              <a:buChar char="•"/>
-            </a:pPr>
-            <a:r>
-              <a:rPr lang="en-US" sz="1800" dirty="0">
-                <a:solidFill>
-                  <a:srgbClr val="111111"/>
-                </a:solidFill>
-                <a:latin typeface="Calibri" pitchFamily="34" charset="0"/>
-                <a:ea typeface="Calibri" pitchFamily="34" charset="-122"/>
-                <a:cs typeface="Calibri" pitchFamily="34" charset="-120"/>
-              </a:rPr>
-              <a:t>Diagrams and animations: drawn for this lesson (Geography Department).</a:t>
-            </a:r>
-            <a:endParaRPr lang="en-US" sz="1800" dirty="0"/>
-          </a:p>
-        </p:txBody>
-      </p:sp>
-      <p:sp>
-        <p:nvSpPr>
-          <p:cNvPr id="25" name="Slide Number Placeholder 0"/>
-          <p:cNvSpPr>
-            <a:spLocks noGrp="1"/>
-          </p:cNvSpPr>
-          <p:nvPr>
-            <p:ph type="sldNum" sz="quarter" idx="4294967295"/>
-          </p:nvPr>
-        </p:nvSpPr>
-        <p:spPr>
-          <a:xfrm>
-            <a:off x="27432" y="91440"/>
-            <a:ext cx="585216" cy="475488"/>
-          </a:xfrm>
-          <a:prstGeom prst="rect">
-            <a:avLst/>
-          </a:prstGeom>
-          <a:extLst>
-            <a:ext uri="{C572A759-6A51-4108-AA02-DFA0A04FC94B}">
-              <ma14:wrappingTextBoxFlag xmlns:ma14="http://schemas.microsoft.com/office/mac/drawingml/2011/main" val="0"/>
-            </a:ext>
-          </a:extLst>
-        </p:spPr>
-        <p:txBody>
-          <a:bodyPr/>
-          <a:lstStyle>
-            <a:lvl1pPr>
-              <a:defRPr sz="2000">
-                <a:solidFill>
-                  <a:srgbClr val="FFFFFF"/>
-                </a:solidFill>
-                <a:latin typeface="Calibri"/>
-                <a:ea typeface="Calibri"/>
-                <a:cs typeface="Calibri"/>
-              </a:defRPr>
-            </a:lvl1pPr>
-          </a:lstStyle>
-          <a:p>
-            <a:pPr algn="ctr"/>
-            <a:fld id="{F7021451-1387-4CA6-816F-3879F97B5CBC}" type="slidenum">
-              <a:rPr b="1" lang="en-US"/>
-              <a:t>55</a:t>
             </a:fld>
             <a:endParaRPr lang="en-US"/>
           </a:p>

--- a/lecons/F2T/12_S06_L3_P2_Desert_Climate.pptx
+++ b/lecons/F2T/12_S06_L3_P2_Desert_Climate.pptx
@@ -3459,7 +3459,7 @@
           <a:p>
             <a:r>
               <a:rPr lang="en-US" dirty="0"/>
-              <a:t>Before we start the new lesson, let us correct the homework I gave you at the end of Lesson 3 (Part 1): The Desert Regions: Location, Types and Characteristics. The question was: Think about the hottest days of March in Garoua. Are the nights also very hot, or cooler? Write two sentences about the difference between day and night. Take out your exercise books.</a:t>
+              <a:t>Before we start the new lesson, let us correct the homework I gave you at the end of Lesson 3 (Part 1): The Desert Regions: Location, Types and Characteristics. The question was: Explain why desert nights are cold. Take out your exercise books.</a:t>
             </a:r>
             <a:endParaRPr lang="en-US" dirty="0"/>
           </a:p>
@@ -4251,7 +4251,7 @@
           <a:p>
             <a:r>
               <a:rPr lang="en-US" dirty="0"/>
-              <a:t>For your homework: Look at a cactus, an acacia or a date palm near your home or in a picture. Write down one way in which it is adapted to lack of water. We shall correct it at the beginning of our next lesson.</a:t>
+              <a:t>For your homework: Give two ways desert plants save water. We shall correct it at the beginning of our next lesson.</a:t>
             </a:r>
             <a:endParaRPr lang="en-US" dirty="0"/>
           </a:p>
@@ -4427,7 +4427,7 @@
           <a:p>
             <a:r>
               <a:rPr lang="en-US" dirty="0"/>
-              <a:t>Here is a good answer. In March the days in Garoua are very hot, often above 40 °C. The nights are cooler, because the heat escapes at night when the sky is clear. Compare it with your own answer and correct your work in red.</a:t>
+              <a:t>Here is a good answer. There are no clouds, so the heat escapes. Compare it with your own answer and correct your work in red.</a:t>
             </a:r>
             <a:endParaRPr lang="en-US" dirty="0"/>
           </a:p>
@@ -15099,7 +15099,7 @@
         <p:spPr>
           <a:xfrm>
             <a:off x="0" y="658368"/>
-            <a:ext cx="2468880" cy="5833872"/>
+            <a:ext cx="5120640" cy="5833872"/>
           </a:xfrm>
           <a:prstGeom prst="rect">
             <a:avLst/>
@@ -15114,8 +15114,8 @@
         </p:nvSpPr>
         <p:spPr>
           <a:xfrm>
-            <a:off x="2697480" y="1005840"/>
-            <a:ext cx="9174175" cy="731520"/>
+            <a:off x="5349240" y="1005840"/>
+            <a:ext cx="6522415" cy="731520"/>
           </a:xfrm>
           <a:prstGeom prst="rect">
             <a:avLst/>
@@ -15155,8 +15155,8 @@
         </p:nvSpPr>
         <p:spPr>
           <a:xfrm>
-            <a:off x="2697480" y="1783080"/>
-            <a:ext cx="9174175" cy="4663440"/>
+            <a:off x="5349240" y="1783080"/>
+            <a:ext cx="6522415" cy="4663440"/>
           </a:xfrm>
           <a:prstGeom prst="rect">
             <a:avLst/>
@@ -15203,7 +15203,7 @@
                 <a:ea typeface="Times New Roman" pitchFamily="34" charset="-122"/>
                 <a:cs typeface="Times New Roman" pitchFamily="34" charset="-120"/>
               </a:rPr>
-              <a:t>Think about the hottest days of March in Garoua. Are the nights also very hot, or cooler? Write two sentences about the difference between day and night.</a:t>
+              <a:t>Explain why desert nights are cold.</a:t>
             </a:r>
             <a:endParaRPr lang="en-US" sz="4000" dirty="0"/>
           </a:p>
@@ -17356,7 +17356,7 @@
                 <a:ea typeface="Times New Roman" pitchFamily="34" charset="-122"/>
                 <a:cs typeface="Times New Roman" pitchFamily="34" charset="-120"/>
               </a:rPr>
-              <a:t>Look at a cactus, an acacia or a date palm near your home or in a picture. Write down one way in which it is adapted to lack of water.</a:t>
+              <a:t>Give two ways desert plants save water.</a:t>
             </a:r>
             <a:endParaRPr lang="en-US" sz="4000" dirty="0"/>
           </a:p>
@@ -17814,7 +17814,7 @@
                 <a:ea typeface="Times New Roman" pitchFamily="34" charset="-122"/>
                 <a:cs typeface="Times New Roman" pitchFamily="34" charset="-120"/>
               </a:rPr>
-              <a:t>In March the days in Garoua are very hot, often above 40 °C. The nights are cooler, because the heat escapes at night when the sky is clear.</a:t>
+              <a:t>There are no clouds, so the heat escapes.</a:t>
             </a:r>
             <a:endParaRPr lang="en-US" sz="4000" dirty="0"/>
           </a:p>
@@ -20515,7 +20515,7 @@
                           <a:ea typeface="Calibri" pitchFamily="34" charset="-122"/>
                           <a:cs typeface="Calibri" pitchFamily="34" charset="-120"/>
                         </a:rPr>
-                        <a:t>Look at a cactus, an acacia or a date palm near your home or in a picture. Write down one way in which it is adapted to lack of water.</a:t>
+                        <a:t>Give two ways desert plants save water.</a:t>
                       </a:r>
                       <a:endParaRPr lang="en-US" sz="1600" dirty="0">
                         <a:latin typeface="Calibri" charset="0"/>
